--- a/demo.pptx
+++ b/demo.pptx
@@ -260,7 +260,7 @@
           <a:p>
             <a:fld id="{1B1D0FCA-53D0-564C-86B9-6B61E7864998}" type="datetimeFigureOut">
               <a:rPr lang="en-US" smtClean="0"/>
-              <a:t>3/2/26</a:t>
+              <a:t>3/24/26</a:t>
             </a:fld>
             <a:endParaRPr lang="en-US"/>
           </a:p>
@@ -458,7 +458,7 @@
           <a:p>
             <a:fld id="{1B1D0FCA-53D0-564C-86B9-6B61E7864998}" type="datetimeFigureOut">
               <a:rPr lang="en-US" smtClean="0"/>
-              <a:t>3/2/26</a:t>
+              <a:t>3/24/26</a:t>
             </a:fld>
             <a:endParaRPr lang="en-US"/>
           </a:p>
@@ -666,7 +666,7 @@
           <a:p>
             <a:fld id="{1B1D0FCA-53D0-564C-86B9-6B61E7864998}" type="datetimeFigureOut">
               <a:rPr lang="en-US" smtClean="0"/>
-              <a:t>3/2/26</a:t>
+              <a:t>3/24/26</a:t>
             </a:fld>
             <a:endParaRPr lang="en-US"/>
           </a:p>
@@ -864,7 +864,7 @@
           <a:p>
             <a:fld id="{1B1D0FCA-53D0-564C-86B9-6B61E7864998}" type="datetimeFigureOut">
               <a:rPr lang="en-US" smtClean="0"/>
-              <a:t>3/2/26</a:t>
+              <a:t>3/24/26</a:t>
             </a:fld>
             <a:endParaRPr lang="en-US"/>
           </a:p>
@@ -1139,7 +1139,7 @@
           <a:p>
             <a:fld id="{1B1D0FCA-53D0-564C-86B9-6B61E7864998}" type="datetimeFigureOut">
               <a:rPr lang="en-US" smtClean="0"/>
-              <a:t>3/2/26</a:t>
+              <a:t>3/24/26</a:t>
             </a:fld>
             <a:endParaRPr lang="en-US"/>
           </a:p>
@@ -1404,7 +1404,7 @@
           <a:p>
             <a:fld id="{1B1D0FCA-53D0-564C-86B9-6B61E7864998}" type="datetimeFigureOut">
               <a:rPr lang="en-US" smtClean="0"/>
-              <a:t>3/2/26</a:t>
+              <a:t>3/24/26</a:t>
             </a:fld>
             <a:endParaRPr lang="en-US"/>
           </a:p>
@@ -1816,7 +1816,7 @@
           <a:p>
             <a:fld id="{1B1D0FCA-53D0-564C-86B9-6B61E7864998}" type="datetimeFigureOut">
               <a:rPr lang="en-US" smtClean="0"/>
-              <a:t>3/2/26</a:t>
+              <a:t>3/24/26</a:t>
             </a:fld>
             <a:endParaRPr lang="en-US"/>
           </a:p>
@@ -1957,7 +1957,7 @@
           <a:p>
             <a:fld id="{1B1D0FCA-53D0-564C-86B9-6B61E7864998}" type="datetimeFigureOut">
               <a:rPr lang="en-US" smtClean="0"/>
-              <a:t>3/2/26</a:t>
+              <a:t>3/24/26</a:t>
             </a:fld>
             <a:endParaRPr lang="en-US"/>
           </a:p>
@@ -2070,7 +2070,7 @@
           <a:p>
             <a:fld id="{1B1D0FCA-53D0-564C-86B9-6B61E7864998}" type="datetimeFigureOut">
               <a:rPr lang="en-US" smtClean="0"/>
-              <a:t>3/2/26</a:t>
+              <a:t>3/24/26</a:t>
             </a:fld>
             <a:endParaRPr lang="en-US"/>
           </a:p>
@@ -2381,7 +2381,7 @@
           <a:p>
             <a:fld id="{1B1D0FCA-53D0-564C-86B9-6B61E7864998}" type="datetimeFigureOut">
               <a:rPr lang="en-US" smtClean="0"/>
-              <a:t>3/2/26</a:t>
+              <a:t>3/24/26</a:t>
             </a:fld>
             <a:endParaRPr lang="en-US"/>
           </a:p>
@@ -2669,7 +2669,7 @@
           <a:p>
             <a:fld id="{1B1D0FCA-53D0-564C-86B9-6B61E7864998}" type="datetimeFigureOut">
               <a:rPr lang="en-US" smtClean="0"/>
-              <a:t>3/2/26</a:t>
+              <a:t>3/24/26</a:t>
             </a:fld>
             <a:endParaRPr lang="en-US"/>
           </a:p>
@@ -2910,7 +2910,7 @@
           <a:p>
             <a:fld id="{1B1D0FCA-53D0-564C-86B9-6B61E7864998}" type="datetimeFigureOut">
               <a:rPr lang="en-US" smtClean="0"/>
-              <a:t>3/2/26</a:t>
+              <a:t>3/24/26</a:t>
             </a:fld>
             <a:endParaRPr lang="en-US"/>
           </a:p>
@@ -3382,990 +3382,965 @@
           </a:p>
         </p:txBody>
       </p:sp>
-      <p:grpSp>
-        <p:nvGrpSpPr>
-          <p:cNvPr id="93" name="Group 92">
-            <a:extLst>
-              <a:ext uri="{FF2B5EF4-FFF2-40B4-BE49-F238E27FC236}">
-                <a16:creationId xmlns:a16="http://schemas.microsoft.com/office/drawing/2014/main" id="{24A3E4EB-DEBD-9C0E-63E3-D345E354B843}"/>
-              </a:ext>
-            </a:extLst>
-          </p:cNvPr>
-          <p:cNvGrpSpPr/>
-          <p:nvPr/>
-        </p:nvGrpSpPr>
-        <p:grpSpPr>
-          <a:xfrm>
-            <a:off x="3957331" y="2850948"/>
-            <a:ext cx="2149044" cy="2745199"/>
-            <a:chOff x="1043564" y="872539"/>
-            <a:chExt cx="2149044" cy="2745199"/>
-          </a:xfrm>
-        </p:grpSpPr>
-        <p:sp>
-          <p:nvSpPr>
-            <p:cNvPr id="40" name="Rectangle 39">
-              <a:extLst>
-                <a:ext uri="{FF2B5EF4-FFF2-40B4-BE49-F238E27FC236}">
-                  <a16:creationId xmlns:a16="http://schemas.microsoft.com/office/drawing/2014/main" id="{1D4F5732-DD18-FEF9-AC23-561E8C219D47}"/>
-                </a:ext>
-              </a:extLst>
-            </p:cNvPr>
-            <p:cNvSpPr/>
-            <p:nvPr/>
-          </p:nvSpPr>
-          <p:spPr>
-            <a:xfrm>
-              <a:off x="1542362" y="1446945"/>
-              <a:ext cx="539826" cy="539826"/>
-            </a:xfrm>
-            <a:prstGeom prst="rect">
-              <a:avLst/>
-            </a:prstGeom>
-          </p:spPr>
-          <p:style>
-            <a:lnRef idx="2">
-              <a:schemeClr val="dk1"/>
-            </a:lnRef>
-            <a:fillRef idx="1">
-              <a:schemeClr val="lt1"/>
-            </a:fillRef>
-            <a:effectRef idx="0">
-              <a:schemeClr val="dk1"/>
-            </a:effectRef>
-            <a:fontRef idx="minor">
-              <a:schemeClr val="dk1"/>
-            </a:fontRef>
-          </p:style>
-          <p:txBody>
-            <a:bodyPr rtlCol="0" anchor="ctr"/>
-            <a:lstStyle/>
-            <a:p>
-              <a:pPr algn="ctr"/>
-              <a:r>
-                <a:rPr lang="en-US" sz="1200" dirty="0"/>
-                <a:t>PE11</a:t>
-              </a:r>
-            </a:p>
-          </p:txBody>
-        </p:sp>
-        <p:sp>
-          <p:nvSpPr>
-            <p:cNvPr id="43" name="Rectangle 42">
-              <a:extLst>
-                <a:ext uri="{FF2B5EF4-FFF2-40B4-BE49-F238E27FC236}">
-                  <a16:creationId xmlns:a16="http://schemas.microsoft.com/office/drawing/2014/main" id="{0647165C-C4A1-9FA3-2FCC-3840E2F6C0A7}"/>
-                </a:ext>
-              </a:extLst>
-            </p:cNvPr>
-            <p:cNvSpPr/>
-            <p:nvPr/>
-          </p:nvSpPr>
-          <p:spPr>
-            <a:xfrm>
-              <a:off x="2622014" y="1446945"/>
-              <a:ext cx="539826" cy="539826"/>
-            </a:xfrm>
-            <a:prstGeom prst="rect">
-              <a:avLst/>
-            </a:prstGeom>
-          </p:spPr>
-          <p:style>
-            <a:lnRef idx="2">
-              <a:schemeClr val="dk1"/>
-            </a:lnRef>
-            <a:fillRef idx="1">
-              <a:schemeClr val="lt1"/>
-            </a:fillRef>
-            <a:effectRef idx="0">
-              <a:schemeClr val="dk1"/>
-            </a:effectRef>
-            <a:fontRef idx="minor">
-              <a:schemeClr val="dk1"/>
-            </a:fontRef>
-          </p:style>
-          <p:txBody>
-            <a:bodyPr rtlCol="0" anchor="ctr"/>
-            <a:lstStyle/>
-            <a:p>
-              <a:pPr algn="ctr"/>
-              <a:r>
-                <a:rPr lang="en-US" sz="1200" dirty="0"/>
-                <a:t>PE12</a:t>
-              </a:r>
-            </a:p>
-          </p:txBody>
-        </p:sp>
-        <p:sp>
-          <p:nvSpPr>
-            <p:cNvPr id="47" name="Rectangle 46">
-              <a:extLst>
-                <a:ext uri="{FF2B5EF4-FFF2-40B4-BE49-F238E27FC236}">
-                  <a16:creationId xmlns:a16="http://schemas.microsoft.com/office/drawing/2014/main" id="{62100FAB-EC6E-5060-A8BD-90943B9668D5}"/>
-                </a:ext>
-              </a:extLst>
-            </p:cNvPr>
-            <p:cNvSpPr/>
-            <p:nvPr/>
-          </p:nvSpPr>
-          <p:spPr>
-            <a:xfrm>
-              <a:off x="1542362" y="2526597"/>
-              <a:ext cx="539826" cy="539826"/>
-            </a:xfrm>
-            <a:prstGeom prst="rect">
-              <a:avLst/>
-            </a:prstGeom>
-          </p:spPr>
-          <p:style>
-            <a:lnRef idx="2">
-              <a:schemeClr val="dk1"/>
-            </a:lnRef>
-            <a:fillRef idx="1">
-              <a:schemeClr val="lt1"/>
-            </a:fillRef>
-            <a:effectRef idx="0">
-              <a:schemeClr val="dk1"/>
-            </a:effectRef>
-            <a:fontRef idx="minor">
-              <a:schemeClr val="dk1"/>
-            </a:fontRef>
-          </p:style>
-          <p:txBody>
-            <a:bodyPr rtlCol="0" anchor="ctr"/>
-            <a:lstStyle/>
-            <a:p>
-              <a:pPr algn="ctr"/>
-              <a:r>
-                <a:rPr lang="en-US" sz="1200" dirty="0"/>
-                <a:t>PE21</a:t>
-              </a:r>
-            </a:p>
-          </p:txBody>
-        </p:sp>
-        <p:sp>
-          <p:nvSpPr>
-            <p:cNvPr id="49" name="Rectangle 48">
-              <a:extLst>
-                <a:ext uri="{FF2B5EF4-FFF2-40B4-BE49-F238E27FC236}">
-                  <a16:creationId xmlns:a16="http://schemas.microsoft.com/office/drawing/2014/main" id="{79205D11-7317-C27A-66D0-443FF29F339D}"/>
-                </a:ext>
-              </a:extLst>
-            </p:cNvPr>
-            <p:cNvSpPr/>
-            <p:nvPr/>
-          </p:nvSpPr>
-          <p:spPr>
-            <a:xfrm>
-              <a:off x="2622014" y="2526597"/>
-              <a:ext cx="539826" cy="539826"/>
-            </a:xfrm>
-            <a:prstGeom prst="rect">
-              <a:avLst/>
-            </a:prstGeom>
-          </p:spPr>
-          <p:style>
-            <a:lnRef idx="2">
-              <a:schemeClr val="dk1"/>
-            </a:lnRef>
-            <a:fillRef idx="1">
-              <a:schemeClr val="lt1"/>
-            </a:fillRef>
-            <a:effectRef idx="0">
-              <a:schemeClr val="dk1"/>
-            </a:effectRef>
-            <a:fontRef idx="minor">
-              <a:schemeClr val="dk1"/>
-            </a:fontRef>
-          </p:style>
-          <p:txBody>
-            <a:bodyPr rtlCol="0" anchor="ctr"/>
-            <a:lstStyle/>
-            <a:p>
-              <a:pPr algn="ctr"/>
-              <a:r>
-                <a:rPr lang="en-US" sz="1200" dirty="0"/>
-                <a:t>PE22</a:t>
-              </a:r>
-            </a:p>
-          </p:txBody>
-        </p:sp>
-        <p:cxnSp>
-          <p:nvCxnSpPr>
-            <p:cNvPr id="52" name="Straight Arrow Connector 51">
-              <a:extLst>
-                <a:ext uri="{FF2B5EF4-FFF2-40B4-BE49-F238E27FC236}">
-                  <a16:creationId xmlns:a16="http://schemas.microsoft.com/office/drawing/2014/main" id="{6AF502F4-C165-7ACE-D8A5-8CE7195D53FB}"/>
-                </a:ext>
-              </a:extLst>
-            </p:cNvPr>
-            <p:cNvCxnSpPr>
-              <a:stCxn id="40" idx="3"/>
-              <a:endCxn id="43" idx="1"/>
-            </p:cNvCxnSpPr>
-            <p:nvPr/>
-          </p:nvCxnSpPr>
-          <p:spPr>
-            <a:xfrm>
-              <a:off x="2082188" y="1716858"/>
-              <a:ext cx="539826" cy="0"/>
-            </a:xfrm>
-            <a:prstGeom prst="straightConnector1">
-              <a:avLst/>
-            </a:prstGeom>
-            <a:ln>
-              <a:tailEnd type="triangle"/>
-            </a:ln>
-          </p:spPr>
-          <p:style>
-            <a:lnRef idx="2">
-              <a:schemeClr val="accent1"/>
-            </a:lnRef>
-            <a:fillRef idx="0">
-              <a:schemeClr val="accent1"/>
-            </a:fillRef>
-            <a:effectRef idx="1">
-              <a:schemeClr val="accent1"/>
-            </a:effectRef>
-            <a:fontRef idx="minor">
-              <a:schemeClr val="tx1"/>
-            </a:fontRef>
-          </p:style>
-        </p:cxnSp>
-        <p:cxnSp>
-          <p:nvCxnSpPr>
-            <p:cNvPr id="53" name="Straight Arrow Connector 52">
-              <a:extLst>
-                <a:ext uri="{FF2B5EF4-FFF2-40B4-BE49-F238E27FC236}">
-                  <a16:creationId xmlns:a16="http://schemas.microsoft.com/office/drawing/2014/main" id="{588366FD-EEC6-002C-D3B8-07DF5FB61BD5}"/>
-                </a:ext>
-              </a:extLst>
-            </p:cNvPr>
-            <p:cNvCxnSpPr>
-              <a:cxnSpLocks/>
-              <a:stCxn id="40" idx="2"/>
-              <a:endCxn id="47" idx="0"/>
-            </p:cNvCxnSpPr>
-            <p:nvPr/>
-          </p:nvCxnSpPr>
-          <p:spPr>
-            <a:xfrm>
-              <a:off x="1812275" y="1986771"/>
-              <a:ext cx="0" cy="539826"/>
-            </a:xfrm>
-            <a:prstGeom prst="straightConnector1">
-              <a:avLst/>
-            </a:prstGeom>
-            <a:ln>
-              <a:tailEnd type="triangle"/>
-            </a:ln>
-          </p:spPr>
-          <p:style>
-            <a:lnRef idx="2">
-              <a:schemeClr val="accent1"/>
-            </a:lnRef>
-            <a:fillRef idx="0">
-              <a:schemeClr val="accent1"/>
-            </a:fillRef>
-            <a:effectRef idx="1">
-              <a:schemeClr val="accent1"/>
-            </a:effectRef>
-            <a:fontRef idx="minor">
-              <a:schemeClr val="tx1"/>
-            </a:fontRef>
-          </p:style>
-        </p:cxnSp>
-        <p:cxnSp>
-          <p:nvCxnSpPr>
-            <p:cNvPr id="56" name="Straight Arrow Connector 55">
-              <a:extLst>
-                <a:ext uri="{FF2B5EF4-FFF2-40B4-BE49-F238E27FC236}">
-                  <a16:creationId xmlns:a16="http://schemas.microsoft.com/office/drawing/2014/main" id="{11BB0BCF-45BE-B3F7-28EB-7A43E5D24254}"/>
-                </a:ext>
-              </a:extLst>
-            </p:cNvPr>
-            <p:cNvCxnSpPr>
-              <a:cxnSpLocks/>
-              <a:stCxn id="43" idx="2"/>
-              <a:endCxn id="49" idx="0"/>
-            </p:cNvCxnSpPr>
-            <p:nvPr/>
-          </p:nvCxnSpPr>
-          <p:spPr>
-            <a:xfrm>
-              <a:off x="2891927" y="1986771"/>
-              <a:ext cx="0" cy="539826"/>
-            </a:xfrm>
-            <a:prstGeom prst="straightConnector1">
-              <a:avLst/>
-            </a:prstGeom>
-            <a:ln>
-              <a:tailEnd type="triangle"/>
-            </a:ln>
-          </p:spPr>
-          <p:style>
-            <a:lnRef idx="2">
-              <a:schemeClr val="accent1"/>
-            </a:lnRef>
-            <a:fillRef idx="0">
-              <a:schemeClr val="accent1"/>
-            </a:fillRef>
-            <a:effectRef idx="1">
-              <a:schemeClr val="accent1"/>
-            </a:effectRef>
-            <a:fontRef idx="minor">
-              <a:schemeClr val="tx1"/>
-            </a:fontRef>
-          </p:style>
-        </p:cxnSp>
-        <p:cxnSp>
-          <p:nvCxnSpPr>
-            <p:cNvPr id="59" name="Straight Arrow Connector 58">
-              <a:extLst>
-                <a:ext uri="{FF2B5EF4-FFF2-40B4-BE49-F238E27FC236}">
-                  <a16:creationId xmlns:a16="http://schemas.microsoft.com/office/drawing/2014/main" id="{2A5ADF67-0F7B-3739-5EC8-908D8F6E1565}"/>
-                </a:ext>
-              </a:extLst>
-            </p:cNvPr>
-            <p:cNvCxnSpPr>
-              <a:cxnSpLocks/>
-              <a:stCxn id="47" idx="3"/>
-              <a:endCxn id="49" idx="1"/>
-            </p:cNvCxnSpPr>
-            <p:nvPr/>
-          </p:nvCxnSpPr>
-          <p:spPr>
-            <a:xfrm>
-              <a:off x="2082188" y="2796510"/>
-              <a:ext cx="539826" cy="0"/>
-            </a:xfrm>
-            <a:prstGeom prst="straightConnector1">
-              <a:avLst/>
-            </a:prstGeom>
-            <a:ln>
-              <a:tailEnd type="triangle"/>
-            </a:ln>
-          </p:spPr>
-          <p:style>
-            <a:lnRef idx="2">
-              <a:schemeClr val="accent1"/>
-            </a:lnRef>
-            <a:fillRef idx="0">
-              <a:schemeClr val="accent1"/>
-            </a:fillRef>
-            <a:effectRef idx="1">
-              <a:schemeClr val="accent1"/>
-            </a:effectRef>
-            <a:fontRef idx="minor">
-              <a:schemeClr val="tx1"/>
-            </a:fontRef>
-          </p:style>
-        </p:cxnSp>
-        <p:cxnSp>
-          <p:nvCxnSpPr>
-            <p:cNvPr id="62" name="Straight Arrow Connector 61">
-              <a:extLst>
-                <a:ext uri="{FF2B5EF4-FFF2-40B4-BE49-F238E27FC236}">
-                  <a16:creationId xmlns:a16="http://schemas.microsoft.com/office/drawing/2014/main" id="{7EC87F2A-E17A-1E5A-B36A-2D3BE69C2765}"/>
-                </a:ext>
-              </a:extLst>
-            </p:cNvPr>
-            <p:cNvCxnSpPr>
-              <a:cxnSpLocks/>
-              <a:endCxn id="40" idx="1"/>
-            </p:cNvCxnSpPr>
-            <p:nvPr/>
-          </p:nvCxnSpPr>
-          <p:spPr>
-            <a:xfrm>
-              <a:off x="1304628" y="1716858"/>
-              <a:ext cx="237734" cy="0"/>
-            </a:xfrm>
-            <a:prstGeom prst="straightConnector1">
-              <a:avLst/>
-            </a:prstGeom>
-            <a:ln>
-              <a:tailEnd type="triangle"/>
-            </a:ln>
-          </p:spPr>
-          <p:style>
-            <a:lnRef idx="2">
-              <a:schemeClr val="accent1"/>
-            </a:lnRef>
-            <a:fillRef idx="0">
-              <a:schemeClr val="accent1"/>
-            </a:fillRef>
-            <a:effectRef idx="1">
-              <a:schemeClr val="accent1"/>
-            </a:effectRef>
-            <a:fontRef idx="minor">
-              <a:schemeClr val="tx1"/>
-            </a:fontRef>
-          </p:style>
-        </p:cxnSp>
-        <p:cxnSp>
-          <p:nvCxnSpPr>
-            <p:cNvPr id="63" name="Straight Arrow Connector 62">
-              <a:extLst>
-                <a:ext uri="{FF2B5EF4-FFF2-40B4-BE49-F238E27FC236}">
-                  <a16:creationId xmlns:a16="http://schemas.microsoft.com/office/drawing/2014/main" id="{CC247092-FFD8-5FD1-745E-F1B56CA11B2A}"/>
-                </a:ext>
-              </a:extLst>
-            </p:cNvPr>
-            <p:cNvCxnSpPr>
-              <a:cxnSpLocks/>
-              <a:endCxn id="47" idx="1"/>
-            </p:cNvCxnSpPr>
-            <p:nvPr/>
-          </p:nvCxnSpPr>
-          <p:spPr>
-            <a:xfrm>
-              <a:off x="1304628" y="2796510"/>
-              <a:ext cx="237734" cy="0"/>
-            </a:xfrm>
-            <a:prstGeom prst="straightConnector1">
-              <a:avLst/>
-            </a:prstGeom>
-            <a:ln>
-              <a:tailEnd type="triangle"/>
-            </a:ln>
-          </p:spPr>
-          <p:style>
-            <a:lnRef idx="2">
-              <a:schemeClr val="accent1"/>
-            </a:lnRef>
-            <a:fillRef idx="0">
-              <a:schemeClr val="accent1"/>
-            </a:fillRef>
-            <a:effectRef idx="1">
-              <a:schemeClr val="accent1"/>
-            </a:effectRef>
-            <a:fontRef idx="minor">
-              <a:schemeClr val="tx1"/>
-            </a:fontRef>
-          </p:style>
-        </p:cxnSp>
-        <p:cxnSp>
-          <p:nvCxnSpPr>
-            <p:cNvPr id="64" name="Straight Arrow Connector 63">
-              <a:extLst>
-                <a:ext uri="{FF2B5EF4-FFF2-40B4-BE49-F238E27FC236}">
-                  <a16:creationId xmlns:a16="http://schemas.microsoft.com/office/drawing/2014/main" id="{9B6DFC5B-C07D-B248-265B-FB3F732EF71F}"/>
-                </a:ext>
-              </a:extLst>
-            </p:cNvPr>
-            <p:cNvCxnSpPr>
-              <a:cxnSpLocks/>
-              <a:endCxn id="40" idx="0"/>
-            </p:cNvCxnSpPr>
-            <p:nvPr/>
-          </p:nvCxnSpPr>
-          <p:spPr>
-            <a:xfrm>
-              <a:off x="1812275" y="1177032"/>
-              <a:ext cx="0" cy="269913"/>
-            </a:xfrm>
-            <a:prstGeom prst="straightConnector1">
-              <a:avLst/>
-            </a:prstGeom>
-            <a:ln>
-              <a:tailEnd type="triangle"/>
-            </a:ln>
-          </p:spPr>
-          <p:style>
-            <a:lnRef idx="2">
-              <a:schemeClr val="accent1"/>
-            </a:lnRef>
-            <a:fillRef idx="0">
-              <a:schemeClr val="accent1"/>
-            </a:fillRef>
-            <a:effectRef idx="1">
-              <a:schemeClr val="accent1"/>
-            </a:effectRef>
-            <a:fontRef idx="minor">
-              <a:schemeClr val="tx1"/>
-            </a:fontRef>
-          </p:style>
-        </p:cxnSp>
-        <p:cxnSp>
-          <p:nvCxnSpPr>
-            <p:cNvPr id="65" name="Straight Arrow Connector 64">
-              <a:extLst>
-                <a:ext uri="{FF2B5EF4-FFF2-40B4-BE49-F238E27FC236}">
-                  <a16:creationId xmlns:a16="http://schemas.microsoft.com/office/drawing/2014/main" id="{FE1B4030-DEA5-D7F8-6B45-0CAFD94C8A23}"/>
-                </a:ext>
-              </a:extLst>
-            </p:cNvPr>
-            <p:cNvCxnSpPr>
-              <a:cxnSpLocks/>
-              <a:endCxn id="43" idx="0"/>
-            </p:cNvCxnSpPr>
-            <p:nvPr/>
-          </p:nvCxnSpPr>
-          <p:spPr>
-            <a:xfrm>
-              <a:off x="2891927" y="1177032"/>
-              <a:ext cx="0" cy="269913"/>
-            </a:xfrm>
-            <a:prstGeom prst="straightConnector1">
-              <a:avLst/>
-            </a:prstGeom>
-            <a:ln>
-              <a:tailEnd type="triangle"/>
-            </a:ln>
-          </p:spPr>
-          <p:style>
-            <a:lnRef idx="2">
-              <a:schemeClr val="accent1"/>
-            </a:lnRef>
-            <a:fillRef idx="0">
-              <a:schemeClr val="accent1"/>
-            </a:fillRef>
-            <a:effectRef idx="1">
-              <a:schemeClr val="accent1"/>
-            </a:effectRef>
-            <a:fontRef idx="minor">
-              <a:schemeClr val="tx1"/>
-            </a:fontRef>
-          </p:style>
-        </p:cxnSp>
-        <p:cxnSp>
-          <p:nvCxnSpPr>
-            <p:cNvPr id="72" name="Straight Arrow Connector 71">
-              <a:extLst>
-                <a:ext uri="{FF2B5EF4-FFF2-40B4-BE49-F238E27FC236}">
-                  <a16:creationId xmlns:a16="http://schemas.microsoft.com/office/drawing/2014/main" id="{2BFAF2F4-6C6B-B6F7-77B1-F854C75DC120}"/>
-                </a:ext>
-              </a:extLst>
-            </p:cNvPr>
-            <p:cNvCxnSpPr>
-              <a:cxnSpLocks/>
-              <a:stCxn id="47" idx="2"/>
-            </p:cNvCxnSpPr>
-            <p:nvPr/>
-          </p:nvCxnSpPr>
-          <p:spPr>
-            <a:xfrm>
-              <a:off x="1812275" y="3066423"/>
-              <a:ext cx="0" cy="269913"/>
-            </a:xfrm>
-            <a:prstGeom prst="straightConnector1">
-              <a:avLst/>
-            </a:prstGeom>
-            <a:ln>
-              <a:tailEnd type="triangle"/>
-            </a:ln>
-          </p:spPr>
-          <p:style>
-            <a:lnRef idx="2">
-              <a:schemeClr val="accent1"/>
-            </a:lnRef>
-            <a:fillRef idx="0">
-              <a:schemeClr val="accent1"/>
-            </a:fillRef>
-            <a:effectRef idx="1">
-              <a:schemeClr val="accent1"/>
-            </a:effectRef>
-            <a:fontRef idx="minor">
-              <a:schemeClr val="tx1"/>
-            </a:fontRef>
-          </p:style>
-        </p:cxnSp>
-        <p:cxnSp>
-          <p:nvCxnSpPr>
-            <p:cNvPr id="73" name="Straight Arrow Connector 72">
-              <a:extLst>
-                <a:ext uri="{FF2B5EF4-FFF2-40B4-BE49-F238E27FC236}">
-                  <a16:creationId xmlns:a16="http://schemas.microsoft.com/office/drawing/2014/main" id="{4BF65B5A-D41E-44AC-A652-BD2DCC932034}"/>
-                </a:ext>
-              </a:extLst>
-            </p:cNvPr>
-            <p:cNvCxnSpPr>
-              <a:cxnSpLocks/>
-              <a:stCxn id="49" idx="2"/>
-            </p:cNvCxnSpPr>
-            <p:nvPr/>
-          </p:nvCxnSpPr>
-          <p:spPr>
-            <a:xfrm>
-              <a:off x="2891927" y="3066423"/>
-              <a:ext cx="0" cy="269913"/>
-            </a:xfrm>
-            <a:prstGeom prst="straightConnector1">
-              <a:avLst/>
-            </a:prstGeom>
-            <a:ln>
-              <a:tailEnd type="triangle"/>
-            </a:ln>
-          </p:spPr>
-          <p:style>
-            <a:lnRef idx="2">
-              <a:schemeClr val="accent1"/>
-            </a:lnRef>
-            <a:fillRef idx="0">
-              <a:schemeClr val="accent1"/>
-            </a:fillRef>
-            <a:effectRef idx="1">
-              <a:schemeClr val="accent1"/>
-            </a:effectRef>
-            <a:fontRef idx="minor">
-              <a:schemeClr val="tx1"/>
-            </a:fontRef>
-          </p:style>
-        </p:cxnSp>
-        <p:sp>
-          <p:nvSpPr>
-            <p:cNvPr id="83" name="TextBox 82">
-              <a:extLst>
-                <a:ext uri="{FF2B5EF4-FFF2-40B4-BE49-F238E27FC236}">
-                  <a16:creationId xmlns:a16="http://schemas.microsoft.com/office/drawing/2014/main" id="{D934EACA-80EF-F724-B861-31279A45B39F}"/>
-                </a:ext>
-              </a:extLst>
-            </p:cNvPr>
-            <p:cNvSpPr txBox="1"/>
-            <p:nvPr/>
-          </p:nvSpPr>
-          <p:spPr>
-            <a:xfrm rot="5400000">
-              <a:off x="1626945" y="2094179"/>
-              <a:ext cx="689612" cy="338554"/>
-            </a:xfrm>
-            <a:prstGeom prst="rect">
-              <a:avLst/>
-            </a:prstGeom>
-            <a:noFill/>
-          </p:spPr>
-          <p:txBody>
-            <a:bodyPr wrap="none" rtlCol="0">
-              <a:spAutoFit/>
-            </a:bodyPr>
-            <a:lstStyle/>
-            <a:p>
-              <a:r>
-                <a:rPr lang="en-US" sz="1600" dirty="0" err="1"/>
-                <a:t>psum</a:t>
-              </a:r>
-              <a:endParaRPr lang="en-US" sz="1600" dirty="0"/>
-            </a:p>
-          </p:txBody>
-        </p:sp>
-        <p:sp>
-          <p:nvSpPr>
-            <p:cNvPr id="84" name="TextBox 83">
-              <a:extLst>
-                <a:ext uri="{FF2B5EF4-FFF2-40B4-BE49-F238E27FC236}">
-                  <a16:creationId xmlns:a16="http://schemas.microsoft.com/office/drawing/2014/main" id="{25BD8A36-A372-8482-AF5C-AFAC215FF89B}"/>
-                </a:ext>
-              </a:extLst>
-            </p:cNvPr>
-            <p:cNvSpPr txBox="1"/>
-            <p:nvPr/>
-          </p:nvSpPr>
-          <p:spPr>
-            <a:xfrm rot="5400000">
-              <a:off x="2678525" y="2087407"/>
-              <a:ext cx="689612" cy="338554"/>
-            </a:xfrm>
-            <a:prstGeom prst="rect">
-              <a:avLst/>
-            </a:prstGeom>
-            <a:noFill/>
-          </p:spPr>
-          <p:txBody>
-            <a:bodyPr wrap="none" rtlCol="0">
-              <a:spAutoFit/>
-            </a:bodyPr>
-            <a:lstStyle/>
-            <a:p>
-              <a:r>
-                <a:rPr lang="en-US" sz="1600" dirty="0" err="1"/>
-                <a:t>psum</a:t>
-              </a:r>
-              <a:endParaRPr lang="en-US" sz="1600" dirty="0"/>
-            </a:p>
-          </p:txBody>
-        </p:sp>
-        <p:sp>
-          <p:nvSpPr>
-            <p:cNvPr id="85" name="TextBox 84">
-              <a:extLst>
-                <a:ext uri="{FF2B5EF4-FFF2-40B4-BE49-F238E27FC236}">
-                  <a16:creationId xmlns:a16="http://schemas.microsoft.com/office/drawing/2014/main" id="{4D9033B4-B9B5-334A-911F-0151DAC4EE00}"/>
-                </a:ext>
-              </a:extLst>
-            </p:cNvPr>
-            <p:cNvSpPr txBox="1"/>
-            <p:nvPr/>
-          </p:nvSpPr>
-          <p:spPr>
-            <a:xfrm>
-              <a:off x="2213418" y="1378304"/>
-              <a:ext cx="293670" cy="338554"/>
-            </a:xfrm>
-            <a:prstGeom prst="rect">
-              <a:avLst/>
-            </a:prstGeom>
-            <a:noFill/>
-          </p:spPr>
-          <p:txBody>
-            <a:bodyPr wrap="none" rtlCol="0">
-              <a:spAutoFit/>
-            </a:bodyPr>
-            <a:lstStyle/>
-            <a:p>
-              <a:r>
-                <a:rPr lang="en-US" sz="1600" dirty="0"/>
-                <a:t>a</a:t>
-              </a:r>
-            </a:p>
-          </p:txBody>
-        </p:sp>
-        <p:sp>
-          <p:nvSpPr>
-            <p:cNvPr id="86" name="TextBox 85">
-              <a:extLst>
-                <a:ext uri="{FF2B5EF4-FFF2-40B4-BE49-F238E27FC236}">
-                  <a16:creationId xmlns:a16="http://schemas.microsoft.com/office/drawing/2014/main" id="{C2FDC7E4-303D-F4EE-EF7E-2B900FEB732E}"/>
-                </a:ext>
-              </a:extLst>
-            </p:cNvPr>
-            <p:cNvSpPr txBox="1"/>
-            <p:nvPr/>
-          </p:nvSpPr>
-          <p:spPr>
-            <a:xfrm>
-              <a:off x="2216015" y="2457956"/>
-              <a:ext cx="293670" cy="338554"/>
-            </a:xfrm>
-            <a:prstGeom prst="rect">
-              <a:avLst/>
-            </a:prstGeom>
-            <a:noFill/>
-          </p:spPr>
-          <p:txBody>
-            <a:bodyPr wrap="none" rtlCol="0">
-              <a:spAutoFit/>
-            </a:bodyPr>
-            <a:lstStyle/>
-            <a:p>
-              <a:r>
-                <a:rPr lang="en-US" sz="1600" dirty="0"/>
-                <a:t>a</a:t>
-              </a:r>
-            </a:p>
-          </p:txBody>
-        </p:sp>
-        <p:sp>
-          <p:nvSpPr>
-            <p:cNvPr id="87" name="TextBox 86">
-              <a:extLst>
-                <a:ext uri="{FF2B5EF4-FFF2-40B4-BE49-F238E27FC236}">
-                  <a16:creationId xmlns:a16="http://schemas.microsoft.com/office/drawing/2014/main" id="{6FF8D24A-7739-0136-13AE-16D43BF12DBF}"/>
-                </a:ext>
-              </a:extLst>
-            </p:cNvPr>
-            <p:cNvSpPr txBox="1"/>
-            <p:nvPr/>
-          </p:nvSpPr>
-          <p:spPr>
-            <a:xfrm>
-              <a:off x="1662234" y="872539"/>
-              <a:ext cx="300082" cy="338554"/>
-            </a:xfrm>
-            <a:prstGeom prst="rect">
-              <a:avLst/>
-            </a:prstGeom>
-            <a:noFill/>
-          </p:spPr>
-          <p:txBody>
-            <a:bodyPr wrap="none" rtlCol="0">
-              <a:spAutoFit/>
-            </a:bodyPr>
-            <a:lstStyle/>
-            <a:p>
-              <a:r>
-                <a:rPr lang="en-US" sz="1600" dirty="0"/>
-                <a:t>b</a:t>
-              </a:r>
-            </a:p>
-          </p:txBody>
-        </p:sp>
-        <p:sp>
-          <p:nvSpPr>
-            <p:cNvPr id="88" name="TextBox 87">
-              <a:extLst>
-                <a:ext uri="{FF2B5EF4-FFF2-40B4-BE49-F238E27FC236}">
-                  <a16:creationId xmlns:a16="http://schemas.microsoft.com/office/drawing/2014/main" id="{D60BFC00-C83E-AC29-AC2D-3615E731B1AB}"/>
-                </a:ext>
-              </a:extLst>
-            </p:cNvPr>
-            <p:cNvSpPr txBox="1"/>
-            <p:nvPr/>
-          </p:nvSpPr>
-          <p:spPr>
-            <a:xfrm>
-              <a:off x="2741886" y="872539"/>
-              <a:ext cx="300082" cy="338554"/>
-            </a:xfrm>
-            <a:prstGeom prst="rect">
-              <a:avLst/>
-            </a:prstGeom>
-            <a:noFill/>
-          </p:spPr>
-          <p:txBody>
-            <a:bodyPr wrap="none" rtlCol="0">
-              <a:spAutoFit/>
-            </a:bodyPr>
-            <a:lstStyle/>
-            <a:p>
-              <a:r>
-                <a:rPr lang="en-US" sz="1600" dirty="0"/>
-                <a:t>b</a:t>
-              </a:r>
-            </a:p>
-          </p:txBody>
-        </p:sp>
-        <p:sp>
-          <p:nvSpPr>
-            <p:cNvPr id="89" name="TextBox 88">
-              <a:extLst>
-                <a:ext uri="{FF2B5EF4-FFF2-40B4-BE49-F238E27FC236}">
-                  <a16:creationId xmlns:a16="http://schemas.microsoft.com/office/drawing/2014/main" id="{8DDA6307-F7B8-3A1E-CDEA-DD86B7B2A544}"/>
-                </a:ext>
-              </a:extLst>
-            </p:cNvPr>
-            <p:cNvSpPr txBox="1"/>
-            <p:nvPr/>
-          </p:nvSpPr>
-          <p:spPr>
-            <a:xfrm>
-              <a:off x="1043564" y="1544982"/>
-              <a:ext cx="293670" cy="338554"/>
-            </a:xfrm>
-            <a:prstGeom prst="rect">
-              <a:avLst/>
-            </a:prstGeom>
-            <a:noFill/>
-          </p:spPr>
-          <p:txBody>
-            <a:bodyPr wrap="none" rtlCol="0">
-              <a:spAutoFit/>
-            </a:bodyPr>
-            <a:lstStyle/>
-            <a:p>
-              <a:r>
-                <a:rPr lang="en-US" sz="1600" dirty="0"/>
-                <a:t>a</a:t>
-              </a:r>
-            </a:p>
-          </p:txBody>
-        </p:sp>
-        <p:sp>
-          <p:nvSpPr>
-            <p:cNvPr id="90" name="TextBox 89">
-              <a:extLst>
-                <a:ext uri="{FF2B5EF4-FFF2-40B4-BE49-F238E27FC236}">
-                  <a16:creationId xmlns:a16="http://schemas.microsoft.com/office/drawing/2014/main" id="{AFF34C0B-B3BF-54FF-0DFD-1C7C780ED24A}"/>
-                </a:ext>
-              </a:extLst>
-            </p:cNvPr>
-            <p:cNvSpPr txBox="1"/>
-            <p:nvPr/>
-          </p:nvSpPr>
-          <p:spPr>
-            <a:xfrm>
-              <a:off x="1046161" y="2624634"/>
-              <a:ext cx="293670" cy="338554"/>
-            </a:xfrm>
-            <a:prstGeom prst="rect">
-              <a:avLst/>
-            </a:prstGeom>
-            <a:noFill/>
-          </p:spPr>
-          <p:txBody>
-            <a:bodyPr wrap="none" rtlCol="0">
-              <a:spAutoFit/>
-            </a:bodyPr>
-            <a:lstStyle/>
-            <a:p>
-              <a:r>
-                <a:rPr lang="en-US" sz="1600" dirty="0"/>
-                <a:t>a</a:t>
-              </a:r>
-            </a:p>
-          </p:txBody>
-        </p:sp>
-        <p:sp>
-          <p:nvSpPr>
-            <p:cNvPr id="91" name="TextBox 90">
-              <a:extLst>
-                <a:ext uri="{FF2B5EF4-FFF2-40B4-BE49-F238E27FC236}">
-                  <a16:creationId xmlns:a16="http://schemas.microsoft.com/office/drawing/2014/main" id="{C2FBBF18-F123-DD49-0AEF-C985749B2BA3}"/>
-                </a:ext>
-              </a:extLst>
-            </p:cNvPr>
-            <p:cNvSpPr txBox="1"/>
-            <p:nvPr/>
-          </p:nvSpPr>
-          <p:spPr>
-            <a:xfrm>
-              <a:off x="1667931" y="3279184"/>
-              <a:ext cx="300082" cy="338554"/>
-            </a:xfrm>
-            <a:prstGeom prst="rect">
-              <a:avLst/>
-            </a:prstGeom>
-            <a:noFill/>
-          </p:spPr>
-          <p:txBody>
-            <a:bodyPr wrap="none" rtlCol="0">
-              <a:spAutoFit/>
-            </a:bodyPr>
-            <a:lstStyle/>
-            <a:p>
-              <a:r>
-                <a:rPr lang="en-US" sz="1600" dirty="0"/>
-                <a:t>c</a:t>
-              </a:r>
-            </a:p>
-          </p:txBody>
-        </p:sp>
-        <p:sp>
-          <p:nvSpPr>
-            <p:cNvPr id="92" name="TextBox 91">
-              <a:extLst>
-                <a:ext uri="{FF2B5EF4-FFF2-40B4-BE49-F238E27FC236}">
-                  <a16:creationId xmlns:a16="http://schemas.microsoft.com/office/drawing/2014/main" id="{78727C08-5E06-C1A7-44C4-FA15C2E45E60}"/>
-                </a:ext>
-              </a:extLst>
-            </p:cNvPr>
-            <p:cNvSpPr txBox="1"/>
-            <p:nvPr/>
-          </p:nvSpPr>
-          <p:spPr>
-            <a:xfrm>
-              <a:off x="2747583" y="3279184"/>
-              <a:ext cx="292068" cy="338554"/>
-            </a:xfrm>
-            <a:prstGeom prst="rect">
-              <a:avLst/>
-            </a:prstGeom>
-            <a:noFill/>
-          </p:spPr>
-          <p:txBody>
-            <a:bodyPr wrap="none" rtlCol="0">
-              <a:spAutoFit/>
-            </a:bodyPr>
-            <a:lstStyle/>
-            <a:p>
-              <a:r>
-                <a:rPr lang="en-US" sz="1600" dirty="0"/>
-                <a:t>c</a:t>
-              </a:r>
-            </a:p>
-          </p:txBody>
-        </p:sp>
-      </p:grpSp>
+      <p:sp>
+        <p:nvSpPr>
+          <p:cNvPr id="40" name="Rectangle 39">
+            <a:extLst>
+              <a:ext uri="{FF2B5EF4-FFF2-40B4-BE49-F238E27FC236}">
+                <a16:creationId xmlns:a16="http://schemas.microsoft.com/office/drawing/2014/main" id="{1D4F5732-DD18-FEF9-AC23-561E8C219D47}"/>
+              </a:ext>
+            </a:extLst>
+          </p:cNvPr>
+          <p:cNvSpPr/>
+          <p:nvPr/>
+        </p:nvSpPr>
+        <p:spPr>
+          <a:xfrm>
+            <a:off x="4456129" y="3425354"/>
+            <a:ext cx="539826" cy="539826"/>
+          </a:xfrm>
+          <a:prstGeom prst="rect">
+            <a:avLst/>
+          </a:prstGeom>
+        </p:spPr>
+        <p:style>
+          <a:lnRef idx="2">
+            <a:schemeClr val="dk1"/>
+          </a:lnRef>
+          <a:fillRef idx="1">
+            <a:schemeClr val="lt1"/>
+          </a:fillRef>
+          <a:effectRef idx="0">
+            <a:schemeClr val="dk1"/>
+          </a:effectRef>
+          <a:fontRef idx="minor">
+            <a:schemeClr val="dk1"/>
+          </a:fontRef>
+        </p:style>
+        <p:txBody>
+          <a:bodyPr rtlCol="0" anchor="ctr"/>
+          <a:lstStyle/>
+          <a:p>
+            <a:pPr algn="ctr"/>
+            <a:r>
+              <a:rPr lang="en-US" sz="1200" dirty="0"/>
+              <a:t>PE11</a:t>
+            </a:r>
+          </a:p>
+        </p:txBody>
+      </p:sp>
+      <p:sp>
+        <p:nvSpPr>
+          <p:cNvPr id="43" name="Rectangle 42">
+            <a:extLst>
+              <a:ext uri="{FF2B5EF4-FFF2-40B4-BE49-F238E27FC236}">
+                <a16:creationId xmlns:a16="http://schemas.microsoft.com/office/drawing/2014/main" id="{0647165C-C4A1-9FA3-2FCC-3840E2F6C0A7}"/>
+              </a:ext>
+            </a:extLst>
+          </p:cNvPr>
+          <p:cNvSpPr/>
+          <p:nvPr/>
+        </p:nvSpPr>
+        <p:spPr>
+          <a:xfrm>
+            <a:off x="5535781" y="3425354"/>
+            <a:ext cx="539826" cy="539826"/>
+          </a:xfrm>
+          <a:prstGeom prst="rect">
+            <a:avLst/>
+          </a:prstGeom>
+        </p:spPr>
+        <p:style>
+          <a:lnRef idx="2">
+            <a:schemeClr val="dk1"/>
+          </a:lnRef>
+          <a:fillRef idx="1">
+            <a:schemeClr val="lt1"/>
+          </a:fillRef>
+          <a:effectRef idx="0">
+            <a:schemeClr val="dk1"/>
+          </a:effectRef>
+          <a:fontRef idx="minor">
+            <a:schemeClr val="dk1"/>
+          </a:fontRef>
+        </p:style>
+        <p:txBody>
+          <a:bodyPr rtlCol="0" anchor="ctr"/>
+          <a:lstStyle/>
+          <a:p>
+            <a:pPr algn="ctr"/>
+            <a:r>
+              <a:rPr lang="en-US" sz="1200" dirty="0"/>
+              <a:t>PE12</a:t>
+            </a:r>
+          </a:p>
+        </p:txBody>
+      </p:sp>
+      <p:sp>
+        <p:nvSpPr>
+          <p:cNvPr id="47" name="Rectangle 46">
+            <a:extLst>
+              <a:ext uri="{FF2B5EF4-FFF2-40B4-BE49-F238E27FC236}">
+                <a16:creationId xmlns:a16="http://schemas.microsoft.com/office/drawing/2014/main" id="{62100FAB-EC6E-5060-A8BD-90943B9668D5}"/>
+              </a:ext>
+            </a:extLst>
+          </p:cNvPr>
+          <p:cNvSpPr/>
+          <p:nvPr/>
+        </p:nvSpPr>
+        <p:spPr>
+          <a:xfrm>
+            <a:off x="4456129" y="4505006"/>
+            <a:ext cx="539826" cy="539826"/>
+          </a:xfrm>
+          <a:prstGeom prst="rect">
+            <a:avLst/>
+          </a:prstGeom>
+        </p:spPr>
+        <p:style>
+          <a:lnRef idx="2">
+            <a:schemeClr val="dk1"/>
+          </a:lnRef>
+          <a:fillRef idx="1">
+            <a:schemeClr val="lt1"/>
+          </a:fillRef>
+          <a:effectRef idx="0">
+            <a:schemeClr val="dk1"/>
+          </a:effectRef>
+          <a:fontRef idx="minor">
+            <a:schemeClr val="dk1"/>
+          </a:fontRef>
+        </p:style>
+        <p:txBody>
+          <a:bodyPr rtlCol="0" anchor="ctr"/>
+          <a:lstStyle/>
+          <a:p>
+            <a:pPr algn="ctr"/>
+            <a:r>
+              <a:rPr lang="en-US" sz="1200" dirty="0"/>
+              <a:t>PE21</a:t>
+            </a:r>
+          </a:p>
+        </p:txBody>
+      </p:sp>
+      <p:sp>
+        <p:nvSpPr>
+          <p:cNvPr id="49" name="Rectangle 48">
+            <a:extLst>
+              <a:ext uri="{FF2B5EF4-FFF2-40B4-BE49-F238E27FC236}">
+                <a16:creationId xmlns:a16="http://schemas.microsoft.com/office/drawing/2014/main" id="{79205D11-7317-C27A-66D0-443FF29F339D}"/>
+              </a:ext>
+            </a:extLst>
+          </p:cNvPr>
+          <p:cNvSpPr/>
+          <p:nvPr/>
+        </p:nvSpPr>
+        <p:spPr>
+          <a:xfrm>
+            <a:off x="5535781" y="4505006"/>
+            <a:ext cx="539826" cy="539826"/>
+          </a:xfrm>
+          <a:prstGeom prst="rect">
+            <a:avLst/>
+          </a:prstGeom>
+        </p:spPr>
+        <p:style>
+          <a:lnRef idx="2">
+            <a:schemeClr val="dk1"/>
+          </a:lnRef>
+          <a:fillRef idx="1">
+            <a:schemeClr val="lt1"/>
+          </a:fillRef>
+          <a:effectRef idx="0">
+            <a:schemeClr val="dk1"/>
+          </a:effectRef>
+          <a:fontRef idx="minor">
+            <a:schemeClr val="dk1"/>
+          </a:fontRef>
+        </p:style>
+        <p:txBody>
+          <a:bodyPr rtlCol="0" anchor="ctr"/>
+          <a:lstStyle/>
+          <a:p>
+            <a:pPr algn="ctr"/>
+            <a:r>
+              <a:rPr lang="en-US" sz="1200" dirty="0"/>
+              <a:t>PE22</a:t>
+            </a:r>
+          </a:p>
+        </p:txBody>
+      </p:sp>
+      <p:cxnSp>
+        <p:nvCxnSpPr>
+          <p:cNvPr id="52" name="Straight Arrow Connector 51">
+            <a:extLst>
+              <a:ext uri="{FF2B5EF4-FFF2-40B4-BE49-F238E27FC236}">
+                <a16:creationId xmlns:a16="http://schemas.microsoft.com/office/drawing/2014/main" id="{6AF502F4-C165-7ACE-D8A5-8CE7195D53FB}"/>
+              </a:ext>
+            </a:extLst>
+          </p:cNvPr>
+          <p:cNvCxnSpPr>
+            <a:stCxn id="40" idx="3"/>
+            <a:endCxn id="43" idx="1"/>
+          </p:cNvCxnSpPr>
+          <p:nvPr/>
+        </p:nvCxnSpPr>
+        <p:spPr>
+          <a:xfrm>
+            <a:off x="4995955" y="3695267"/>
+            <a:ext cx="539826" cy="0"/>
+          </a:xfrm>
+          <a:prstGeom prst="straightConnector1">
+            <a:avLst/>
+          </a:prstGeom>
+          <a:ln>
+            <a:tailEnd type="triangle"/>
+          </a:ln>
+        </p:spPr>
+        <p:style>
+          <a:lnRef idx="2">
+            <a:schemeClr val="accent1"/>
+          </a:lnRef>
+          <a:fillRef idx="0">
+            <a:schemeClr val="accent1"/>
+          </a:fillRef>
+          <a:effectRef idx="1">
+            <a:schemeClr val="accent1"/>
+          </a:effectRef>
+          <a:fontRef idx="minor">
+            <a:schemeClr val="tx1"/>
+          </a:fontRef>
+        </p:style>
+      </p:cxnSp>
+      <p:cxnSp>
+        <p:nvCxnSpPr>
+          <p:cNvPr id="53" name="Straight Arrow Connector 52">
+            <a:extLst>
+              <a:ext uri="{FF2B5EF4-FFF2-40B4-BE49-F238E27FC236}">
+                <a16:creationId xmlns:a16="http://schemas.microsoft.com/office/drawing/2014/main" id="{588366FD-EEC6-002C-D3B8-07DF5FB61BD5}"/>
+              </a:ext>
+            </a:extLst>
+          </p:cNvPr>
+          <p:cNvCxnSpPr>
+            <a:cxnSpLocks/>
+          </p:cNvCxnSpPr>
+          <p:nvPr/>
+        </p:nvCxnSpPr>
+        <p:spPr>
+          <a:xfrm>
+            <a:off x="4814819" y="3965180"/>
+            <a:ext cx="0" cy="539826"/>
+          </a:xfrm>
+          <a:prstGeom prst="straightConnector1">
+            <a:avLst/>
+          </a:prstGeom>
+          <a:ln>
+            <a:tailEnd type="triangle"/>
+          </a:ln>
+        </p:spPr>
+        <p:style>
+          <a:lnRef idx="2">
+            <a:schemeClr val="accent1"/>
+          </a:lnRef>
+          <a:fillRef idx="0">
+            <a:schemeClr val="accent1"/>
+          </a:fillRef>
+          <a:effectRef idx="1">
+            <a:schemeClr val="accent1"/>
+          </a:effectRef>
+          <a:fontRef idx="minor">
+            <a:schemeClr val="tx1"/>
+          </a:fontRef>
+        </p:style>
+      </p:cxnSp>
+      <p:cxnSp>
+        <p:nvCxnSpPr>
+          <p:cNvPr id="56" name="Straight Arrow Connector 55">
+            <a:extLst>
+              <a:ext uri="{FF2B5EF4-FFF2-40B4-BE49-F238E27FC236}">
+                <a16:creationId xmlns:a16="http://schemas.microsoft.com/office/drawing/2014/main" id="{11BB0BCF-45BE-B3F7-28EB-7A43E5D24254}"/>
+              </a:ext>
+            </a:extLst>
+          </p:cNvPr>
+          <p:cNvCxnSpPr>
+            <a:cxnSpLocks/>
+          </p:cNvCxnSpPr>
+          <p:nvPr/>
+        </p:nvCxnSpPr>
+        <p:spPr>
+          <a:xfrm>
+            <a:off x="5894471" y="3965180"/>
+            <a:ext cx="0" cy="539826"/>
+          </a:xfrm>
+          <a:prstGeom prst="straightConnector1">
+            <a:avLst/>
+          </a:prstGeom>
+          <a:ln>
+            <a:tailEnd type="triangle"/>
+          </a:ln>
+        </p:spPr>
+        <p:style>
+          <a:lnRef idx="2">
+            <a:schemeClr val="accent1"/>
+          </a:lnRef>
+          <a:fillRef idx="0">
+            <a:schemeClr val="accent1"/>
+          </a:fillRef>
+          <a:effectRef idx="1">
+            <a:schemeClr val="accent1"/>
+          </a:effectRef>
+          <a:fontRef idx="minor">
+            <a:schemeClr val="tx1"/>
+          </a:fontRef>
+        </p:style>
+      </p:cxnSp>
+      <p:cxnSp>
+        <p:nvCxnSpPr>
+          <p:cNvPr id="59" name="Straight Arrow Connector 58">
+            <a:extLst>
+              <a:ext uri="{FF2B5EF4-FFF2-40B4-BE49-F238E27FC236}">
+                <a16:creationId xmlns:a16="http://schemas.microsoft.com/office/drawing/2014/main" id="{2A5ADF67-0F7B-3739-5EC8-908D8F6E1565}"/>
+              </a:ext>
+            </a:extLst>
+          </p:cNvPr>
+          <p:cNvCxnSpPr>
+            <a:cxnSpLocks/>
+            <a:stCxn id="47" idx="3"/>
+            <a:endCxn id="49" idx="1"/>
+          </p:cNvCxnSpPr>
+          <p:nvPr/>
+        </p:nvCxnSpPr>
+        <p:spPr>
+          <a:xfrm>
+            <a:off x="4995955" y="4774919"/>
+            <a:ext cx="539826" cy="0"/>
+          </a:xfrm>
+          <a:prstGeom prst="straightConnector1">
+            <a:avLst/>
+          </a:prstGeom>
+          <a:ln>
+            <a:tailEnd type="triangle"/>
+          </a:ln>
+        </p:spPr>
+        <p:style>
+          <a:lnRef idx="2">
+            <a:schemeClr val="accent1"/>
+          </a:lnRef>
+          <a:fillRef idx="0">
+            <a:schemeClr val="accent1"/>
+          </a:fillRef>
+          <a:effectRef idx="1">
+            <a:schemeClr val="accent1"/>
+          </a:effectRef>
+          <a:fontRef idx="minor">
+            <a:schemeClr val="tx1"/>
+          </a:fontRef>
+        </p:style>
+      </p:cxnSp>
+      <p:cxnSp>
+        <p:nvCxnSpPr>
+          <p:cNvPr id="62" name="Straight Arrow Connector 61">
+            <a:extLst>
+              <a:ext uri="{FF2B5EF4-FFF2-40B4-BE49-F238E27FC236}">
+                <a16:creationId xmlns:a16="http://schemas.microsoft.com/office/drawing/2014/main" id="{7EC87F2A-E17A-1E5A-B36A-2D3BE69C2765}"/>
+              </a:ext>
+            </a:extLst>
+          </p:cNvPr>
+          <p:cNvCxnSpPr>
+            <a:cxnSpLocks/>
+            <a:endCxn id="40" idx="1"/>
+          </p:cNvCxnSpPr>
+          <p:nvPr/>
+        </p:nvCxnSpPr>
+        <p:spPr>
+          <a:xfrm>
+            <a:off x="4218395" y="3695267"/>
+            <a:ext cx="237734" cy="0"/>
+          </a:xfrm>
+          <a:prstGeom prst="straightConnector1">
+            <a:avLst/>
+          </a:prstGeom>
+          <a:ln>
+            <a:tailEnd type="triangle"/>
+          </a:ln>
+        </p:spPr>
+        <p:style>
+          <a:lnRef idx="2">
+            <a:schemeClr val="accent1"/>
+          </a:lnRef>
+          <a:fillRef idx="0">
+            <a:schemeClr val="accent1"/>
+          </a:fillRef>
+          <a:effectRef idx="1">
+            <a:schemeClr val="accent1"/>
+          </a:effectRef>
+          <a:fontRef idx="minor">
+            <a:schemeClr val="tx1"/>
+          </a:fontRef>
+        </p:style>
+      </p:cxnSp>
+      <p:cxnSp>
+        <p:nvCxnSpPr>
+          <p:cNvPr id="63" name="Straight Arrow Connector 62">
+            <a:extLst>
+              <a:ext uri="{FF2B5EF4-FFF2-40B4-BE49-F238E27FC236}">
+                <a16:creationId xmlns:a16="http://schemas.microsoft.com/office/drawing/2014/main" id="{CC247092-FFD8-5FD1-745E-F1B56CA11B2A}"/>
+              </a:ext>
+            </a:extLst>
+          </p:cNvPr>
+          <p:cNvCxnSpPr>
+            <a:cxnSpLocks/>
+            <a:endCxn id="47" idx="1"/>
+          </p:cNvCxnSpPr>
+          <p:nvPr/>
+        </p:nvCxnSpPr>
+        <p:spPr>
+          <a:xfrm>
+            <a:off x="4218395" y="4774919"/>
+            <a:ext cx="237734" cy="0"/>
+          </a:xfrm>
+          <a:prstGeom prst="straightConnector1">
+            <a:avLst/>
+          </a:prstGeom>
+          <a:ln>
+            <a:tailEnd type="triangle"/>
+          </a:ln>
+        </p:spPr>
+        <p:style>
+          <a:lnRef idx="2">
+            <a:schemeClr val="accent1"/>
+          </a:lnRef>
+          <a:fillRef idx="0">
+            <a:schemeClr val="accent1"/>
+          </a:fillRef>
+          <a:effectRef idx="1">
+            <a:schemeClr val="accent1"/>
+          </a:effectRef>
+          <a:fontRef idx="minor">
+            <a:schemeClr val="tx1"/>
+          </a:fontRef>
+        </p:style>
+      </p:cxnSp>
+      <p:cxnSp>
+        <p:nvCxnSpPr>
+          <p:cNvPr id="64" name="Straight Arrow Connector 63">
+            <a:extLst>
+              <a:ext uri="{FF2B5EF4-FFF2-40B4-BE49-F238E27FC236}">
+                <a16:creationId xmlns:a16="http://schemas.microsoft.com/office/drawing/2014/main" id="{9B6DFC5B-C07D-B248-265B-FB3F732EF71F}"/>
+              </a:ext>
+            </a:extLst>
+          </p:cNvPr>
+          <p:cNvCxnSpPr>
+            <a:cxnSpLocks/>
+            <a:endCxn id="40" idx="0"/>
+          </p:cNvCxnSpPr>
+          <p:nvPr/>
+        </p:nvCxnSpPr>
+        <p:spPr>
+          <a:xfrm>
+            <a:off x="4726042" y="3155441"/>
+            <a:ext cx="0" cy="269913"/>
+          </a:xfrm>
+          <a:prstGeom prst="straightConnector1">
+            <a:avLst/>
+          </a:prstGeom>
+          <a:ln>
+            <a:tailEnd type="triangle"/>
+          </a:ln>
+        </p:spPr>
+        <p:style>
+          <a:lnRef idx="2">
+            <a:schemeClr val="accent1"/>
+          </a:lnRef>
+          <a:fillRef idx="0">
+            <a:schemeClr val="accent1"/>
+          </a:fillRef>
+          <a:effectRef idx="1">
+            <a:schemeClr val="accent1"/>
+          </a:effectRef>
+          <a:fontRef idx="minor">
+            <a:schemeClr val="tx1"/>
+          </a:fontRef>
+        </p:style>
+      </p:cxnSp>
+      <p:cxnSp>
+        <p:nvCxnSpPr>
+          <p:cNvPr id="65" name="Straight Arrow Connector 64">
+            <a:extLst>
+              <a:ext uri="{FF2B5EF4-FFF2-40B4-BE49-F238E27FC236}">
+                <a16:creationId xmlns:a16="http://schemas.microsoft.com/office/drawing/2014/main" id="{FE1B4030-DEA5-D7F8-6B45-0CAFD94C8A23}"/>
+              </a:ext>
+            </a:extLst>
+          </p:cNvPr>
+          <p:cNvCxnSpPr>
+            <a:cxnSpLocks/>
+            <a:endCxn id="43" idx="0"/>
+          </p:cNvCxnSpPr>
+          <p:nvPr/>
+        </p:nvCxnSpPr>
+        <p:spPr>
+          <a:xfrm>
+            <a:off x="5805694" y="3155441"/>
+            <a:ext cx="0" cy="269913"/>
+          </a:xfrm>
+          <a:prstGeom prst="straightConnector1">
+            <a:avLst/>
+          </a:prstGeom>
+          <a:ln>
+            <a:tailEnd type="triangle"/>
+          </a:ln>
+        </p:spPr>
+        <p:style>
+          <a:lnRef idx="2">
+            <a:schemeClr val="accent1"/>
+          </a:lnRef>
+          <a:fillRef idx="0">
+            <a:schemeClr val="accent1"/>
+          </a:fillRef>
+          <a:effectRef idx="1">
+            <a:schemeClr val="accent1"/>
+          </a:effectRef>
+          <a:fontRef idx="minor">
+            <a:schemeClr val="tx1"/>
+          </a:fontRef>
+        </p:style>
+      </p:cxnSp>
+      <p:cxnSp>
+        <p:nvCxnSpPr>
+          <p:cNvPr id="72" name="Straight Arrow Connector 71">
+            <a:extLst>
+              <a:ext uri="{FF2B5EF4-FFF2-40B4-BE49-F238E27FC236}">
+                <a16:creationId xmlns:a16="http://schemas.microsoft.com/office/drawing/2014/main" id="{2BFAF2F4-6C6B-B6F7-77B1-F854C75DC120}"/>
+              </a:ext>
+            </a:extLst>
+          </p:cNvPr>
+          <p:cNvCxnSpPr>
+            <a:cxnSpLocks/>
+            <a:stCxn id="47" idx="2"/>
+          </p:cNvCxnSpPr>
+          <p:nvPr/>
+        </p:nvCxnSpPr>
+        <p:spPr>
+          <a:xfrm>
+            <a:off x="4726042" y="5044832"/>
+            <a:ext cx="0" cy="269913"/>
+          </a:xfrm>
+          <a:prstGeom prst="straightConnector1">
+            <a:avLst/>
+          </a:prstGeom>
+          <a:ln>
+            <a:tailEnd type="triangle"/>
+          </a:ln>
+        </p:spPr>
+        <p:style>
+          <a:lnRef idx="2">
+            <a:schemeClr val="accent1"/>
+          </a:lnRef>
+          <a:fillRef idx="0">
+            <a:schemeClr val="accent1"/>
+          </a:fillRef>
+          <a:effectRef idx="1">
+            <a:schemeClr val="accent1"/>
+          </a:effectRef>
+          <a:fontRef idx="minor">
+            <a:schemeClr val="tx1"/>
+          </a:fontRef>
+        </p:style>
+      </p:cxnSp>
+      <p:cxnSp>
+        <p:nvCxnSpPr>
+          <p:cNvPr id="73" name="Straight Arrow Connector 72">
+            <a:extLst>
+              <a:ext uri="{FF2B5EF4-FFF2-40B4-BE49-F238E27FC236}">
+                <a16:creationId xmlns:a16="http://schemas.microsoft.com/office/drawing/2014/main" id="{4BF65B5A-D41E-44AC-A652-BD2DCC932034}"/>
+              </a:ext>
+            </a:extLst>
+          </p:cNvPr>
+          <p:cNvCxnSpPr>
+            <a:cxnSpLocks/>
+            <a:stCxn id="49" idx="2"/>
+          </p:cNvCxnSpPr>
+          <p:nvPr/>
+        </p:nvCxnSpPr>
+        <p:spPr>
+          <a:xfrm>
+            <a:off x="5805694" y="5044832"/>
+            <a:ext cx="0" cy="269913"/>
+          </a:xfrm>
+          <a:prstGeom prst="straightConnector1">
+            <a:avLst/>
+          </a:prstGeom>
+          <a:ln>
+            <a:tailEnd type="triangle"/>
+          </a:ln>
+        </p:spPr>
+        <p:style>
+          <a:lnRef idx="2">
+            <a:schemeClr val="accent1"/>
+          </a:lnRef>
+          <a:fillRef idx="0">
+            <a:schemeClr val="accent1"/>
+          </a:fillRef>
+          <a:effectRef idx="1">
+            <a:schemeClr val="accent1"/>
+          </a:effectRef>
+          <a:fontRef idx="minor">
+            <a:schemeClr val="tx1"/>
+          </a:fontRef>
+        </p:style>
+      </p:cxnSp>
+      <p:sp>
+        <p:nvSpPr>
+          <p:cNvPr id="83" name="TextBox 82">
+            <a:extLst>
+              <a:ext uri="{FF2B5EF4-FFF2-40B4-BE49-F238E27FC236}">
+                <a16:creationId xmlns:a16="http://schemas.microsoft.com/office/drawing/2014/main" id="{D934EACA-80EF-F724-B861-31279A45B39F}"/>
+              </a:ext>
+            </a:extLst>
+          </p:cNvPr>
+          <p:cNvSpPr txBox="1"/>
+          <p:nvPr/>
+        </p:nvSpPr>
+        <p:spPr>
+          <a:xfrm rot="5400000">
+            <a:off x="4602855" y="4072588"/>
+            <a:ext cx="689612" cy="338554"/>
+          </a:xfrm>
+          <a:prstGeom prst="rect">
+            <a:avLst/>
+          </a:prstGeom>
+          <a:noFill/>
+        </p:spPr>
+        <p:txBody>
+          <a:bodyPr wrap="none" rtlCol="0">
+            <a:spAutoFit/>
+          </a:bodyPr>
+          <a:lstStyle/>
+          <a:p>
+            <a:r>
+              <a:rPr lang="en-US" sz="1600" dirty="0" err="1"/>
+              <a:t>psum</a:t>
+            </a:r>
+            <a:endParaRPr lang="en-US" sz="1600" dirty="0"/>
+          </a:p>
+        </p:txBody>
+      </p:sp>
+      <p:sp>
+        <p:nvSpPr>
+          <p:cNvPr id="84" name="TextBox 83">
+            <a:extLst>
+              <a:ext uri="{FF2B5EF4-FFF2-40B4-BE49-F238E27FC236}">
+                <a16:creationId xmlns:a16="http://schemas.microsoft.com/office/drawing/2014/main" id="{25BD8A36-A372-8482-AF5C-AFAC215FF89B}"/>
+              </a:ext>
+            </a:extLst>
+          </p:cNvPr>
+          <p:cNvSpPr txBox="1"/>
+          <p:nvPr/>
+        </p:nvSpPr>
+        <p:spPr>
+          <a:xfrm rot="5400000">
+            <a:off x="5672191" y="4065816"/>
+            <a:ext cx="689612" cy="338554"/>
+          </a:xfrm>
+          <a:prstGeom prst="rect">
+            <a:avLst/>
+          </a:prstGeom>
+          <a:noFill/>
+        </p:spPr>
+        <p:txBody>
+          <a:bodyPr wrap="none" rtlCol="0">
+            <a:spAutoFit/>
+          </a:bodyPr>
+          <a:lstStyle/>
+          <a:p>
+            <a:r>
+              <a:rPr lang="en-US" sz="1600" dirty="0" err="1"/>
+              <a:t>psum</a:t>
+            </a:r>
+            <a:endParaRPr lang="en-US" sz="1600" dirty="0"/>
+          </a:p>
+        </p:txBody>
+      </p:sp>
+      <p:sp>
+        <p:nvSpPr>
+          <p:cNvPr id="85" name="TextBox 84">
+            <a:extLst>
+              <a:ext uri="{FF2B5EF4-FFF2-40B4-BE49-F238E27FC236}">
+                <a16:creationId xmlns:a16="http://schemas.microsoft.com/office/drawing/2014/main" id="{4D9033B4-B9B5-334A-911F-0151DAC4EE00}"/>
+              </a:ext>
+            </a:extLst>
+          </p:cNvPr>
+          <p:cNvSpPr txBox="1"/>
+          <p:nvPr/>
+        </p:nvSpPr>
+        <p:spPr>
+          <a:xfrm>
+            <a:off x="5127185" y="3356713"/>
+            <a:ext cx="293670" cy="338554"/>
+          </a:xfrm>
+          <a:prstGeom prst="rect">
+            <a:avLst/>
+          </a:prstGeom>
+          <a:noFill/>
+        </p:spPr>
+        <p:txBody>
+          <a:bodyPr wrap="none" rtlCol="0">
+            <a:spAutoFit/>
+          </a:bodyPr>
+          <a:lstStyle/>
+          <a:p>
+            <a:r>
+              <a:rPr lang="en-US" sz="1600" dirty="0"/>
+              <a:t>a</a:t>
+            </a:r>
+          </a:p>
+        </p:txBody>
+      </p:sp>
+      <p:sp>
+        <p:nvSpPr>
+          <p:cNvPr id="86" name="TextBox 85">
+            <a:extLst>
+              <a:ext uri="{FF2B5EF4-FFF2-40B4-BE49-F238E27FC236}">
+                <a16:creationId xmlns:a16="http://schemas.microsoft.com/office/drawing/2014/main" id="{C2FDC7E4-303D-F4EE-EF7E-2B900FEB732E}"/>
+              </a:ext>
+            </a:extLst>
+          </p:cNvPr>
+          <p:cNvSpPr txBox="1"/>
+          <p:nvPr/>
+        </p:nvSpPr>
+        <p:spPr>
+          <a:xfrm>
+            <a:off x="5129782" y="4436365"/>
+            <a:ext cx="293670" cy="338554"/>
+          </a:xfrm>
+          <a:prstGeom prst="rect">
+            <a:avLst/>
+          </a:prstGeom>
+          <a:noFill/>
+        </p:spPr>
+        <p:txBody>
+          <a:bodyPr wrap="none" rtlCol="0">
+            <a:spAutoFit/>
+          </a:bodyPr>
+          <a:lstStyle/>
+          <a:p>
+            <a:r>
+              <a:rPr lang="en-US" sz="1600" dirty="0"/>
+              <a:t>a</a:t>
+            </a:r>
+          </a:p>
+        </p:txBody>
+      </p:sp>
+      <p:sp>
+        <p:nvSpPr>
+          <p:cNvPr id="87" name="TextBox 86">
+            <a:extLst>
+              <a:ext uri="{FF2B5EF4-FFF2-40B4-BE49-F238E27FC236}">
+                <a16:creationId xmlns:a16="http://schemas.microsoft.com/office/drawing/2014/main" id="{6FF8D24A-7739-0136-13AE-16D43BF12DBF}"/>
+              </a:ext>
+            </a:extLst>
+          </p:cNvPr>
+          <p:cNvSpPr txBox="1"/>
+          <p:nvPr/>
+        </p:nvSpPr>
+        <p:spPr>
+          <a:xfrm>
+            <a:off x="4576001" y="2850948"/>
+            <a:ext cx="300082" cy="338554"/>
+          </a:xfrm>
+          <a:prstGeom prst="rect">
+            <a:avLst/>
+          </a:prstGeom>
+          <a:noFill/>
+        </p:spPr>
+        <p:txBody>
+          <a:bodyPr wrap="none" rtlCol="0">
+            <a:spAutoFit/>
+          </a:bodyPr>
+          <a:lstStyle/>
+          <a:p>
+            <a:r>
+              <a:rPr lang="en-US" sz="1600" dirty="0"/>
+              <a:t>b</a:t>
+            </a:r>
+          </a:p>
+        </p:txBody>
+      </p:sp>
+      <p:sp>
+        <p:nvSpPr>
+          <p:cNvPr id="88" name="TextBox 87">
+            <a:extLst>
+              <a:ext uri="{FF2B5EF4-FFF2-40B4-BE49-F238E27FC236}">
+                <a16:creationId xmlns:a16="http://schemas.microsoft.com/office/drawing/2014/main" id="{D60BFC00-C83E-AC29-AC2D-3615E731B1AB}"/>
+              </a:ext>
+            </a:extLst>
+          </p:cNvPr>
+          <p:cNvSpPr txBox="1"/>
+          <p:nvPr/>
+        </p:nvSpPr>
+        <p:spPr>
+          <a:xfrm>
+            <a:off x="5655653" y="2850948"/>
+            <a:ext cx="300082" cy="338554"/>
+          </a:xfrm>
+          <a:prstGeom prst="rect">
+            <a:avLst/>
+          </a:prstGeom>
+          <a:noFill/>
+        </p:spPr>
+        <p:txBody>
+          <a:bodyPr wrap="none" rtlCol="0">
+            <a:spAutoFit/>
+          </a:bodyPr>
+          <a:lstStyle/>
+          <a:p>
+            <a:r>
+              <a:rPr lang="en-US" sz="1600" dirty="0"/>
+              <a:t>b</a:t>
+            </a:r>
+          </a:p>
+        </p:txBody>
+      </p:sp>
+      <p:sp>
+        <p:nvSpPr>
+          <p:cNvPr id="89" name="TextBox 88">
+            <a:extLst>
+              <a:ext uri="{FF2B5EF4-FFF2-40B4-BE49-F238E27FC236}">
+                <a16:creationId xmlns:a16="http://schemas.microsoft.com/office/drawing/2014/main" id="{8DDA6307-F7B8-3A1E-CDEA-DD86B7B2A544}"/>
+              </a:ext>
+            </a:extLst>
+          </p:cNvPr>
+          <p:cNvSpPr txBox="1"/>
+          <p:nvPr/>
+        </p:nvSpPr>
+        <p:spPr>
+          <a:xfrm>
+            <a:off x="3957331" y="3523391"/>
+            <a:ext cx="293670" cy="338554"/>
+          </a:xfrm>
+          <a:prstGeom prst="rect">
+            <a:avLst/>
+          </a:prstGeom>
+          <a:noFill/>
+        </p:spPr>
+        <p:txBody>
+          <a:bodyPr wrap="none" rtlCol="0">
+            <a:spAutoFit/>
+          </a:bodyPr>
+          <a:lstStyle/>
+          <a:p>
+            <a:r>
+              <a:rPr lang="en-US" sz="1600" dirty="0"/>
+              <a:t>a</a:t>
+            </a:r>
+          </a:p>
+        </p:txBody>
+      </p:sp>
+      <p:sp>
+        <p:nvSpPr>
+          <p:cNvPr id="90" name="TextBox 89">
+            <a:extLst>
+              <a:ext uri="{FF2B5EF4-FFF2-40B4-BE49-F238E27FC236}">
+                <a16:creationId xmlns:a16="http://schemas.microsoft.com/office/drawing/2014/main" id="{AFF34C0B-B3BF-54FF-0DFD-1C7C780ED24A}"/>
+              </a:ext>
+            </a:extLst>
+          </p:cNvPr>
+          <p:cNvSpPr txBox="1"/>
+          <p:nvPr/>
+        </p:nvSpPr>
+        <p:spPr>
+          <a:xfrm>
+            <a:off x="3959928" y="4603043"/>
+            <a:ext cx="293670" cy="338554"/>
+          </a:xfrm>
+          <a:prstGeom prst="rect">
+            <a:avLst/>
+          </a:prstGeom>
+          <a:noFill/>
+        </p:spPr>
+        <p:txBody>
+          <a:bodyPr wrap="none" rtlCol="0">
+            <a:spAutoFit/>
+          </a:bodyPr>
+          <a:lstStyle/>
+          <a:p>
+            <a:r>
+              <a:rPr lang="en-US" sz="1600" dirty="0"/>
+              <a:t>a</a:t>
+            </a:r>
+          </a:p>
+        </p:txBody>
+      </p:sp>
+      <p:sp>
+        <p:nvSpPr>
+          <p:cNvPr id="91" name="TextBox 90">
+            <a:extLst>
+              <a:ext uri="{FF2B5EF4-FFF2-40B4-BE49-F238E27FC236}">
+                <a16:creationId xmlns:a16="http://schemas.microsoft.com/office/drawing/2014/main" id="{C2FBBF18-F123-DD49-0AEF-C985749B2BA3}"/>
+              </a:ext>
+            </a:extLst>
+          </p:cNvPr>
+          <p:cNvSpPr txBox="1"/>
+          <p:nvPr/>
+        </p:nvSpPr>
+        <p:spPr>
+          <a:xfrm>
+            <a:off x="4581698" y="5257593"/>
+            <a:ext cx="300082" cy="338554"/>
+          </a:xfrm>
+          <a:prstGeom prst="rect">
+            <a:avLst/>
+          </a:prstGeom>
+          <a:noFill/>
+        </p:spPr>
+        <p:txBody>
+          <a:bodyPr wrap="none" rtlCol="0">
+            <a:spAutoFit/>
+          </a:bodyPr>
+          <a:lstStyle/>
+          <a:p>
+            <a:r>
+              <a:rPr lang="en-US" sz="1600" dirty="0"/>
+              <a:t>c</a:t>
+            </a:r>
+          </a:p>
+        </p:txBody>
+      </p:sp>
+      <p:sp>
+        <p:nvSpPr>
+          <p:cNvPr id="92" name="TextBox 91">
+            <a:extLst>
+              <a:ext uri="{FF2B5EF4-FFF2-40B4-BE49-F238E27FC236}">
+                <a16:creationId xmlns:a16="http://schemas.microsoft.com/office/drawing/2014/main" id="{78727C08-5E06-C1A7-44C4-FA15C2E45E60}"/>
+              </a:ext>
+            </a:extLst>
+          </p:cNvPr>
+          <p:cNvSpPr txBox="1"/>
+          <p:nvPr/>
+        </p:nvSpPr>
+        <p:spPr>
+          <a:xfrm>
+            <a:off x="5661350" y="5257593"/>
+            <a:ext cx="292068" cy="338554"/>
+          </a:xfrm>
+          <a:prstGeom prst="rect">
+            <a:avLst/>
+          </a:prstGeom>
+          <a:noFill/>
+        </p:spPr>
+        <p:txBody>
+          <a:bodyPr wrap="none" rtlCol="0">
+            <a:spAutoFit/>
+          </a:bodyPr>
+          <a:lstStyle/>
+          <a:p>
+            <a:r>
+              <a:rPr lang="en-US" sz="1600" dirty="0"/>
+              <a:t>c</a:t>
+            </a:r>
+          </a:p>
+        </p:txBody>
+      </p:sp>
       <p:sp>
         <p:nvSpPr>
           <p:cNvPr id="96" name="TextBox 95">
@@ -6212,17 +6187,18 @@
           </p:cNvPr>
           <p:cNvCxnSpPr>
             <a:cxnSpLocks/>
+            <a:stCxn id="209" idx="2"/>
           </p:cNvCxnSpPr>
           <p:nvPr/>
         </p:nvCxnSpPr>
         <p:spPr>
           <a:xfrm rot="16200000" flipH="1">
-            <a:off x="10336870" y="4574948"/>
-            <a:ext cx="660087" cy="154565"/>
+            <a:off x="10516942" y="4764447"/>
+            <a:ext cx="307990" cy="146516"/>
           </a:xfrm>
           <a:prstGeom prst="bentConnector3">
             <a:avLst>
-              <a:gd name="adj1" fmla="val 99578"/>
+              <a:gd name="adj1" fmla="val 99482"/>
             </a:avLst>
           </a:prstGeom>
           <a:ln>
@@ -6258,7 +6234,7 @@
         </p:nvSpPr>
         <p:spPr>
           <a:xfrm>
-            <a:off x="10359784" y="4025665"/>
+            <a:off x="10252873" y="4345156"/>
             <a:ext cx="689612" cy="338554"/>
           </a:xfrm>
           <a:prstGeom prst="rect">
@@ -7204,6 +7180,392 @@
               <a:rPr lang="en-US" sz="1200" dirty="0"/>
               <a:t>0      1</a:t>
             </a:r>
+          </a:p>
+        </p:txBody>
+      </p:sp>
+      <p:cxnSp>
+        <p:nvCxnSpPr>
+          <p:cNvPr id="11" name="Straight Arrow Connector 10">
+            <a:extLst>
+              <a:ext uri="{FF2B5EF4-FFF2-40B4-BE49-F238E27FC236}">
+                <a16:creationId xmlns:a16="http://schemas.microsoft.com/office/drawing/2014/main" id="{56170219-9400-4AE8-11F8-1120E43C5E27}"/>
+              </a:ext>
+            </a:extLst>
+          </p:cNvPr>
+          <p:cNvCxnSpPr>
+            <a:cxnSpLocks/>
+          </p:cNvCxnSpPr>
+          <p:nvPr/>
+        </p:nvCxnSpPr>
+        <p:spPr>
+          <a:xfrm>
+            <a:off x="4551591" y="3965180"/>
+            <a:ext cx="0" cy="539826"/>
+          </a:xfrm>
+          <a:prstGeom prst="straightConnector1">
+            <a:avLst/>
+          </a:prstGeom>
+          <a:ln>
+            <a:tailEnd type="triangle"/>
+          </a:ln>
+        </p:spPr>
+        <p:style>
+          <a:lnRef idx="2">
+            <a:schemeClr val="accent1"/>
+          </a:lnRef>
+          <a:fillRef idx="0">
+            <a:schemeClr val="accent1"/>
+          </a:fillRef>
+          <a:effectRef idx="1">
+            <a:schemeClr val="accent1"/>
+          </a:effectRef>
+          <a:fontRef idx="minor">
+            <a:schemeClr val="tx1"/>
+          </a:fontRef>
+        </p:style>
+      </p:cxnSp>
+      <p:cxnSp>
+        <p:nvCxnSpPr>
+          <p:cNvPr id="12" name="Straight Arrow Connector 11">
+            <a:extLst>
+              <a:ext uri="{FF2B5EF4-FFF2-40B4-BE49-F238E27FC236}">
+                <a16:creationId xmlns:a16="http://schemas.microsoft.com/office/drawing/2014/main" id="{1E68FF42-B87A-086A-12F4-77CA353DF139}"/>
+              </a:ext>
+            </a:extLst>
+          </p:cNvPr>
+          <p:cNvCxnSpPr>
+            <a:cxnSpLocks/>
+          </p:cNvCxnSpPr>
+          <p:nvPr/>
+        </p:nvCxnSpPr>
+        <p:spPr>
+          <a:xfrm>
+            <a:off x="5640768" y="3965180"/>
+            <a:ext cx="0" cy="539826"/>
+          </a:xfrm>
+          <a:prstGeom prst="straightConnector1">
+            <a:avLst/>
+          </a:prstGeom>
+          <a:ln>
+            <a:tailEnd type="triangle"/>
+          </a:ln>
+        </p:spPr>
+        <p:style>
+          <a:lnRef idx="2">
+            <a:schemeClr val="accent1"/>
+          </a:lnRef>
+          <a:fillRef idx="0">
+            <a:schemeClr val="accent1"/>
+          </a:fillRef>
+          <a:effectRef idx="1">
+            <a:schemeClr val="accent1"/>
+          </a:effectRef>
+          <a:fontRef idx="minor">
+            <a:schemeClr val="tx1"/>
+          </a:fontRef>
+        </p:style>
+      </p:cxnSp>
+      <p:sp>
+        <p:nvSpPr>
+          <p:cNvPr id="14" name="TextBox 13">
+            <a:extLst>
+              <a:ext uri="{FF2B5EF4-FFF2-40B4-BE49-F238E27FC236}">
+                <a16:creationId xmlns:a16="http://schemas.microsoft.com/office/drawing/2014/main" id="{813A955C-8F00-95FB-AFF9-8AC78EF6DD6A}"/>
+              </a:ext>
+            </a:extLst>
+          </p:cNvPr>
+          <p:cNvSpPr txBox="1"/>
+          <p:nvPr/>
+        </p:nvSpPr>
+        <p:spPr>
+          <a:xfrm>
+            <a:off x="5597487" y="4065816"/>
+            <a:ext cx="300082" cy="338554"/>
+          </a:xfrm>
+          <a:prstGeom prst="rect">
+            <a:avLst/>
+          </a:prstGeom>
+          <a:noFill/>
+        </p:spPr>
+        <p:txBody>
+          <a:bodyPr wrap="none" rtlCol="0">
+            <a:spAutoFit/>
+          </a:bodyPr>
+          <a:lstStyle/>
+          <a:p>
+            <a:r>
+              <a:rPr lang="en-US" sz="1600" dirty="0"/>
+              <a:t>b</a:t>
+            </a:r>
+          </a:p>
+        </p:txBody>
+      </p:sp>
+      <p:sp>
+        <p:nvSpPr>
+          <p:cNvPr id="15" name="TextBox 14">
+            <a:extLst>
+              <a:ext uri="{FF2B5EF4-FFF2-40B4-BE49-F238E27FC236}">
+                <a16:creationId xmlns:a16="http://schemas.microsoft.com/office/drawing/2014/main" id="{8E48C1A1-AB29-A7EC-912D-BDB741B1F36B}"/>
+              </a:ext>
+            </a:extLst>
+          </p:cNvPr>
+          <p:cNvSpPr txBox="1"/>
+          <p:nvPr/>
+        </p:nvSpPr>
+        <p:spPr>
+          <a:xfrm>
+            <a:off x="4501979" y="4060072"/>
+            <a:ext cx="300082" cy="338554"/>
+          </a:xfrm>
+          <a:prstGeom prst="rect">
+            <a:avLst/>
+          </a:prstGeom>
+          <a:noFill/>
+        </p:spPr>
+        <p:txBody>
+          <a:bodyPr wrap="none" rtlCol="0">
+            <a:spAutoFit/>
+          </a:bodyPr>
+          <a:lstStyle/>
+          <a:p>
+            <a:r>
+              <a:rPr lang="en-US" sz="1600" dirty="0"/>
+              <a:t>b</a:t>
+            </a:r>
+          </a:p>
+        </p:txBody>
+      </p:sp>
+      <p:sp>
+        <p:nvSpPr>
+          <p:cNvPr id="16" name="TextBox 15">
+            <a:extLst>
+              <a:ext uri="{FF2B5EF4-FFF2-40B4-BE49-F238E27FC236}">
+                <a16:creationId xmlns:a16="http://schemas.microsoft.com/office/drawing/2014/main" id="{F6A11E2D-44BB-746A-00F2-3FADE088B858}"/>
+              </a:ext>
+            </a:extLst>
+          </p:cNvPr>
+          <p:cNvSpPr txBox="1"/>
+          <p:nvPr/>
+        </p:nvSpPr>
+        <p:spPr>
+          <a:xfrm>
+            <a:off x="7563740" y="4065250"/>
+            <a:ext cx="890127" cy="338554"/>
+          </a:xfrm>
+          <a:prstGeom prst="rect">
+            <a:avLst/>
+          </a:prstGeom>
+          <a:noFill/>
+        </p:spPr>
+        <p:txBody>
+          <a:bodyPr wrap="square">
+            <a:spAutoFit/>
+          </a:bodyPr>
+          <a:lstStyle/>
+          <a:p>
+            <a:r>
+              <a:rPr lang="en-US" sz="1600" dirty="0" err="1"/>
+              <a:t>load_en</a:t>
+            </a:r>
+            <a:endParaRPr lang="en-US" sz="1600" dirty="0"/>
+          </a:p>
+        </p:txBody>
+      </p:sp>
+      <p:cxnSp>
+        <p:nvCxnSpPr>
+          <p:cNvPr id="17" name="Straight Arrow Connector 16">
+            <a:extLst>
+              <a:ext uri="{FF2B5EF4-FFF2-40B4-BE49-F238E27FC236}">
+                <a16:creationId xmlns:a16="http://schemas.microsoft.com/office/drawing/2014/main" id="{FF985899-7E48-D642-8A00-A8D603A7B3C0}"/>
+              </a:ext>
+            </a:extLst>
+          </p:cNvPr>
+          <p:cNvCxnSpPr>
+            <a:cxnSpLocks/>
+            <a:stCxn id="16" idx="3"/>
+          </p:cNvCxnSpPr>
+          <p:nvPr/>
+        </p:nvCxnSpPr>
+        <p:spPr>
+          <a:xfrm>
+            <a:off x="8453867" y="4234527"/>
+            <a:ext cx="283560" cy="0"/>
+          </a:xfrm>
+          <a:prstGeom prst="straightConnector1">
+            <a:avLst/>
+          </a:prstGeom>
+          <a:ln>
+            <a:tailEnd type="triangle"/>
+          </a:ln>
+        </p:spPr>
+        <p:style>
+          <a:lnRef idx="2">
+            <a:schemeClr val="accent1"/>
+          </a:lnRef>
+          <a:fillRef idx="0">
+            <a:schemeClr val="accent1"/>
+          </a:fillRef>
+          <a:effectRef idx="1">
+            <a:schemeClr val="accent1"/>
+          </a:effectRef>
+          <a:fontRef idx="minor">
+            <a:schemeClr val="tx1"/>
+          </a:fontRef>
+        </p:style>
+      </p:cxnSp>
+      <p:sp>
+        <p:nvSpPr>
+          <p:cNvPr id="22" name="TextBox 21">
+            <a:extLst>
+              <a:ext uri="{FF2B5EF4-FFF2-40B4-BE49-F238E27FC236}">
+                <a16:creationId xmlns:a16="http://schemas.microsoft.com/office/drawing/2014/main" id="{451B663C-AE7A-554D-A24C-D8F27BC0AFB6}"/>
+              </a:ext>
+            </a:extLst>
+          </p:cNvPr>
+          <p:cNvSpPr txBox="1"/>
+          <p:nvPr/>
+        </p:nvSpPr>
+        <p:spPr>
+          <a:xfrm>
+            <a:off x="10594555" y="4071194"/>
+            <a:ext cx="890127" cy="338554"/>
+          </a:xfrm>
+          <a:prstGeom prst="rect">
+            <a:avLst/>
+          </a:prstGeom>
+          <a:noFill/>
+        </p:spPr>
+        <p:txBody>
+          <a:bodyPr wrap="square">
+            <a:spAutoFit/>
+          </a:bodyPr>
+          <a:lstStyle/>
+          <a:p>
+            <a:r>
+              <a:rPr lang="en-US" sz="1600" dirty="0" err="1"/>
+              <a:t>load_en</a:t>
+            </a:r>
+            <a:endParaRPr lang="en-US" sz="1600" dirty="0"/>
+          </a:p>
+        </p:txBody>
+      </p:sp>
+      <p:cxnSp>
+        <p:nvCxnSpPr>
+          <p:cNvPr id="23" name="Straight Arrow Connector 22">
+            <a:extLst>
+              <a:ext uri="{FF2B5EF4-FFF2-40B4-BE49-F238E27FC236}">
+                <a16:creationId xmlns:a16="http://schemas.microsoft.com/office/drawing/2014/main" id="{44C2448E-8C2F-9662-A307-C7CDEFD8B280}"/>
+              </a:ext>
+            </a:extLst>
+          </p:cNvPr>
+          <p:cNvCxnSpPr>
+            <a:cxnSpLocks/>
+            <a:stCxn id="22" idx="1"/>
+            <a:endCxn id="131" idx="3"/>
+          </p:cNvCxnSpPr>
+          <p:nvPr/>
+        </p:nvCxnSpPr>
+        <p:spPr>
+          <a:xfrm flipH="1" flipV="1">
+            <a:off x="10317972" y="4239569"/>
+            <a:ext cx="276583" cy="902"/>
+          </a:xfrm>
+          <a:prstGeom prst="straightConnector1">
+            <a:avLst/>
+          </a:prstGeom>
+          <a:ln>
+            <a:tailEnd type="triangle"/>
+          </a:ln>
+        </p:spPr>
+        <p:style>
+          <a:lnRef idx="2">
+            <a:schemeClr val="accent1"/>
+          </a:lnRef>
+          <a:fillRef idx="0">
+            <a:schemeClr val="accent1"/>
+          </a:fillRef>
+          <a:effectRef idx="1">
+            <a:schemeClr val="accent1"/>
+          </a:effectRef>
+          <a:fontRef idx="minor">
+            <a:schemeClr val="tx1"/>
+          </a:fontRef>
+        </p:style>
+      </p:cxnSp>
+      <p:cxnSp>
+        <p:nvCxnSpPr>
+          <p:cNvPr id="27" name="Straight Arrow Connector 26">
+            <a:extLst>
+              <a:ext uri="{FF2B5EF4-FFF2-40B4-BE49-F238E27FC236}">
+                <a16:creationId xmlns:a16="http://schemas.microsoft.com/office/drawing/2014/main" id="{D19A780F-D7EB-C366-B132-F044FD40F657}"/>
+              </a:ext>
+            </a:extLst>
+          </p:cNvPr>
+          <p:cNvCxnSpPr>
+            <a:cxnSpLocks/>
+          </p:cNvCxnSpPr>
+          <p:nvPr/>
+        </p:nvCxnSpPr>
+        <p:spPr>
+          <a:xfrm flipV="1">
+            <a:off x="10892178" y="5301368"/>
+            <a:ext cx="0" cy="282882"/>
+          </a:xfrm>
+          <a:prstGeom prst="straightConnector1">
+            <a:avLst/>
+          </a:prstGeom>
+          <a:ln>
+            <a:tailEnd type="triangle"/>
+          </a:ln>
+        </p:spPr>
+        <p:style>
+          <a:lnRef idx="2">
+            <a:schemeClr val="accent1"/>
+          </a:lnRef>
+          <a:fillRef idx="0">
+            <a:schemeClr val="accent1"/>
+          </a:fillRef>
+          <a:effectRef idx="1">
+            <a:schemeClr val="accent1"/>
+          </a:effectRef>
+          <a:fontRef idx="minor">
+            <a:schemeClr val="tx1"/>
+          </a:fontRef>
+        </p:style>
+      </p:cxnSp>
+      <p:sp>
+        <p:nvSpPr>
+          <p:cNvPr id="30" name="TextBox 29">
+            <a:extLst>
+              <a:ext uri="{FF2B5EF4-FFF2-40B4-BE49-F238E27FC236}">
+                <a16:creationId xmlns:a16="http://schemas.microsoft.com/office/drawing/2014/main" id="{00FEA3FE-B606-09C9-A41E-FB69F42FC192}"/>
+              </a:ext>
+            </a:extLst>
+          </p:cNvPr>
+          <p:cNvSpPr txBox="1"/>
+          <p:nvPr/>
+        </p:nvSpPr>
+        <p:spPr>
+          <a:xfrm>
+            <a:off x="10546435" y="5501540"/>
+            <a:ext cx="890127" cy="338554"/>
+          </a:xfrm>
+          <a:prstGeom prst="rect">
+            <a:avLst/>
+          </a:prstGeom>
+          <a:noFill/>
+        </p:spPr>
+        <p:txBody>
+          <a:bodyPr wrap="square">
+            <a:spAutoFit/>
+          </a:bodyPr>
+          <a:lstStyle/>
+          <a:p>
+            <a:r>
+              <a:rPr lang="en-US" sz="1600" dirty="0" err="1"/>
+              <a:t>pe_en</a:t>
+            </a:r>
+            <a:endParaRPr lang="en-US" sz="1600" dirty="0"/>
           </a:p>
         </p:txBody>
       </p:sp>
@@ -7251,7 +7613,7 @@
         </p:nvSpPr>
         <p:spPr>
           <a:xfrm>
-            <a:off x="151714" y="807888"/>
+            <a:off x="567417" y="1013718"/>
             <a:ext cx="1127232" cy="369332"/>
           </a:xfrm>
           <a:prstGeom prst="rect">
@@ -7293,7 +7655,7 @@
         </p:nvSpPr>
         <p:spPr>
           <a:xfrm>
-            <a:off x="248654" y="6401239"/>
+            <a:off x="224476" y="6404651"/>
             <a:ext cx="6084679" cy="338554"/>
           </a:xfrm>
           <a:prstGeom prst="rect">
@@ -7319,10 +7681,10 @@
       </p:sp>
       <p:sp>
         <p:nvSpPr>
-          <p:cNvPr id="22" name="TextBox 21">
-            <a:extLst>
-              <a:ext uri="{FF2B5EF4-FFF2-40B4-BE49-F238E27FC236}">
-                <a16:creationId xmlns:a16="http://schemas.microsoft.com/office/drawing/2014/main" id="{DCFD6A63-5FCA-ED34-8796-D5BECEFCAAF4}"/>
+          <p:cNvPr id="24" name="TextBox 23">
+            <a:extLst>
+              <a:ext uri="{FF2B5EF4-FFF2-40B4-BE49-F238E27FC236}">
+                <a16:creationId xmlns:a16="http://schemas.microsoft.com/office/drawing/2014/main" id="{F4993C5C-17FE-5965-A358-943787F60984}"/>
               </a:ext>
             </a:extLst>
           </p:cNvPr>
@@ -7331,42 +7693,7 @@
         </p:nvSpPr>
         <p:spPr>
           <a:xfrm>
-            <a:off x="7278531" y="1200138"/>
-            <a:ext cx="3226117" cy="369332"/>
-          </a:xfrm>
-          <a:prstGeom prst="rect">
-            <a:avLst/>
-          </a:prstGeom>
-          <a:noFill/>
-        </p:spPr>
-        <p:txBody>
-          <a:bodyPr wrap="square" rtlCol="0">
-            <a:spAutoFit/>
-          </a:bodyPr>
-          <a:lstStyle/>
-          <a:p>
-            <a:r>
-              <a:rPr lang="en-US" b="1" dirty="0"/>
-              <a:t>Throughput Improvement:</a:t>
-            </a:r>
-          </a:p>
-        </p:txBody>
-      </p:sp>
-      <p:sp>
-        <p:nvSpPr>
-          <p:cNvPr id="24" name="TextBox 23">
-            <a:extLst>
-              <a:ext uri="{FF2B5EF4-FFF2-40B4-BE49-F238E27FC236}">
-                <a16:creationId xmlns:a16="http://schemas.microsoft.com/office/drawing/2014/main" id="{F4993C5C-17FE-5965-A358-943787F60984}"/>
-              </a:ext>
-            </a:extLst>
-          </p:cNvPr>
-          <p:cNvSpPr txBox="1"/>
-          <p:nvPr/>
-        </p:nvSpPr>
-        <p:spPr>
-          <a:xfrm>
-            <a:off x="401781" y="1287368"/>
+            <a:off x="817484" y="1493198"/>
             <a:ext cx="1127360" cy="369332"/>
           </a:xfrm>
           <a:prstGeom prst="rect">
@@ -7403,7 +7730,7 @@
             </p:nvSpPr>
             <p:spPr>
               <a:xfrm>
-                <a:off x="1087615" y="1829450"/>
+                <a:off x="1503318" y="2035280"/>
                 <a:ext cx="1600438" cy="467500"/>
               </a:xfrm>
               <a:prstGeom prst="rect">
@@ -7600,16 +7927,16 @@
             </p:nvSpPr>
             <p:spPr>
               <a:xfrm>
-                <a:off x="1087615" y="1829450"/>
+                <a:off x="1503318" y="2035280"/>
                 <a:ext cx="1600438" cy="467500"/>
               </a:xfrm>
               <a:prstGeom prst="rect">
                 <a:avLst/>
               </a:prstGeom>
               <a:blipFill>
-                <a:blip r:embed="rId3"/>
+                <a:blip r:embed="rId2"/>
                 <a:stretch>
-                  <a:fillRect b="-21622"/>
+                  <a:fillRect b="-18421"/>
                 </a:stretch>
               </a:blipFill>
             </p:spPr>
@@ -7642,7 +7969,7 @@
         </p:nvSpPr>
         <p:spPr>
           <a:xfrm>
-            <a:off x="401781" y="1878534"/>
+            <a:off x="817484" y="2084364"/>
             <a:ext cx="671979" cy="369332"/>
           </a:xfrm>
           <a:prstGeom prst="rect">
@@ -7679,7 +8006,7 @@
             </p:nvSpPr>
             <p:spPr>
               <a:xfrm>
-                <a:off x="1087615" y="2460982"/>
+                <a:off x="1503318" y="2666812"/>
                 <a:ext cx="1600438" cy="461986"/>
               </a:xfrm>
               <a:prstGeom prst="rect">
@@ -7876,16 +8203,16 @@
             </p:nvSpPr>
             <p:spPr>
               <a:xfrm>
-                <a:off x="1087615" y="2460982"/>
+                <a:off x="1503318" y="2666812"/>
                 <a:ext cx="1600438" cy="461986"/>
               </a:xfrm>
               <a:prstGeom prst="rect">
                 <a:avLst/>
               </a:prstGeom>
               <a:blipFill>
-                <a:blip r:embed="rId4"/>
+                <a:blip r:embed="rId3"/>
                 <a:stretch>
-                  <a:fillRect t="-2703" b="-18919"/>
+                  <a:fillRect b="-15789"/>
                 </a:stretch>
               </a:blipFill>
             </p:spPr>
@@ -7918,7 +8245,7 @@
         </p:nvSpPr>
         <p:spPr>
           <a:xfrm>
-            <a:off x="401781" y="2510066"/>
+            <a:off x="817484" y="2715896"/>
             <a:ext cx="671979" cy="369332"/>
           </a:xfrm>
           <a:prstGeom prst="rect">
@@ -7953,7 +8280,7 @@
         </p:nvSpPr>
         <p:spPr>
           <a:xfrm>
-            <a:off x="2909454" y="1287368"/>
+            <a:off x="3675352" y="1493198"/>
             <a:ext cx="1180580" cy="369332"/>
           </a:xfrm>
           <a:prstGeom prst="rect">
@@ -7990,7 +8317,7 @@
             </p:nvSpPr>
             <p:spPr>
               <a:xfrm>
-                <a:off x="2867543" y="1786073"/>
+                <a:off x="3633441" y="1991903"/>
                 <a:ext cx="1149927" cy="554254"/>
               </a:xfrm>
               <a:prstGeom prst="rect">
@@ -8118,14 +8445,14 @@
             </p:nvSpPr>
             <p:spPr>
               <a:xfrm>
-                <a:off x="2867543" y="1786073"/>
+                <a:off x="3633441" y="1991903"/>
                 <a:ext cx="1149927" cy="554254"/>
               </a:xfrm>
               <a:prstGeom prst="rect">
                 <a:avLst/>
               </a:prstGeom>
               <a:blipFill>
-                <a:blip r:embed="rId5"/>
+                <a:blip r:embed="rId4"/>
                 <a:stretch>
                   <a:fillRect b="-4444"/>
                 </a:stretch>
@@ -8162,7 +8489,7 @@
             </p:nvSpPr>
             <p:spPr>
               <a:xfrm>
-                <a:off x="2735833" y="2414815"/>
+                <a:off x="3501731" y="2620645"/>
                 <a:ext cx="1149927" cy="554319"/>
               </a:xfrm>
               <a:prstGeom prst="rect">
@@ -8283,16 +8610,16 @@
             </p:nvSpPr>
             <p:spPr>
               <a:xfrm>
-                <a:off x="2735833" y="2414815"/>
+                <a:off x="3501731" y="2620645"/>
                 <a:ext cx="1149927" cy="554319"/>
               </a:xfrm>
               <a:prstGeom prst="rect">
                 <a:avLst/>
               </a:prstGeom>
               <a:blipFill>
-                <a:blip r:embed="rId6"/>
+                <a:blip r:embed="rId5"/>
                 <a:stretch>
-                  <a:fillRect b="-4545"/>
+                  <a:fillRect b="-4444"/>
                 </a:stretch>
               </a:blipFill>
             </p:spPr>
@@ -8325,7 +8652,7 @@
         </p:nvSpPr>
         <p:spPr>
           <a:xfrm>
-            <a:off x="4310498" y="1205519"/>
+            <a:off x="5348770" y="1411349"/>
             <a:ext cx="1369799" cy="646331"/>
           </a:xfrm>
           <a:prstGeom prst="rect">
@@ -8340,7 +8667,7 @@
           <a:lstStyle/>
           <a:p>
             <a:r>
-              <a:rPr lang="en-US" b="1" dirty="0"/>
+              <a:rPr lang="en-US" dirty="0"/>
               <a:t>Functional Result:</a:t>
             </a:r>
           </a:p>
@@ -8360,7 +8687,7 @@
         </p:nvSpPr>
         <p:spPr>
           <a:xfrm>
-            <a:off x="4417212" y="1892879"/>
+            <a:off x="5455484" y="2098709"/>
             <a:ext cx="701923" cy="369332"/>
           </a:xfrm>
           <a:prstGeom prst="rect">
@@ -8395,7 +8722,7 @@
         </p:nvSpPr>
         <p:spPr>
           <a:xfrm>
-            <a:off x="4417211" y="2507387"/>
+            <a:off x="5455483" y="2713217"/>
             <a:ext cx="701923" cy="369332"/>
           </a:xfrm>
           <a:prstGeom prst="rect">
@@ -8416,150 +8743,6 @@
           </a:p>
         </p:txBody>
       </p:sp>
-      <mc:AlternateContent xmlns:mc="http://schemas.openxmlformats.org/markup-compatibility/2006" xmlns:a14="http://schemas.microsoft.com/office/drawing/2010/main">
-        <mc:Choice Requires="a14">
-          <p:sp>
-            <p:nvSpPr>
-              <p:cNvPr id="40" name="TextBox 39">
-                <a:extLst>
-                  <a:ext uri="{FF2B5EF4-FFF2-40B4-BE49-F238E27FC236}">
-                    <a16:creationId xmlns:a16="http://schemas.microsoft.com/office/drawing/2014/main" id="{392BC30E-9189-8963-609C-ADAC23029721}"/>
-                  </a:ext>
-                </a:extLst>
-              </p:cNvPr>
-              <p:cNvSpPr txBox="1"/>
-              <p:nvPr/>
-            </p:nvSpPr>
-            <p:spPr>
-              <a:xfrm>
-                <a:off x="7278532" y="1782644"/>
-                <a:ext cx="4681906" cy="2031325"/>
-              </a:xfrm>
-              <a:prstGeom prst="rect">
-                <a:avLst/>
-              </a:prstGeom>
-              <a:noFill/>
-            </p:spPr>
-            <p:txBody>
-              <a:bodyPr wrap="square">
-                <a:spAutoFit/>
-              </a:bodyPr>
-              <a:lstStyle/>
-              <a:p>
-                <a:r>
-                  <a:rPr lang="en-US" dirty="0"/>
-                  <a:t>With double buffering, the systolic array achieves a throughput</a:t>
-                </a:r>
-                <a:r>
-                  <a:rPr lang="zh-CN" altLang="en-US" dirty="0"/>
-                  <a:t> </a:t>
-                </a:r>
-                <a:r>
-                  <a:rPr lang="en-US" dirty="0"/>
-                  <a:t>= 2/5 = 0.4 ops/cycle,</a:t>
-                </a:r>
-              </a:p>
-              <a:p>
-                <a:endParaRPr lang="en-US" dirty="0"/>
-              </a:p>
-              <a:p>
-                <a:r>
-                  <a:rPr lang="en-US" dirty="0"/>
-                  <a:t>compared to without double buffering</a:t>
-                </a:r>
-                <a:r>
-                  <a:rPr lang="zh-CN" altLang="en-US" dirty="0"/>
-                  <a:t> </a:t>
-                </a:r>
-                <a:r>
-                  <a:rPr lang="en-US" altLang="zh-CN" dirty="0"/>
-                  <a:t>achieves</a:t>
-                </a:r>
-                <a:r>
-                  <a:rPr lang="en-US" dirty="0"/>
-                  <a:t> a throughput = 2/8 = 0.25 ops/cycle, </a:t>
-                </a:r>
-              </a:p>
-              <a:p>
-                <a:endParaRPr lang="en-US" dirty="0"/>
-              </a:p>
-              <a:p>
-                <a:r>
-                  <a:rPr lang="en-US" dirty="0"/>
-                  <a:t>yielding a </a:t>
-                </a:r>
-                <a:r>
-                  <a:rPr lang="en-US" altLang="zh-CN" dirty="0"/>
-                  <a:t>1.6</a:t>
-                </a:r>
-                <a14:m>
-                  <m:oMath xmlns:m="http://schemas.openxmlformats.org/officeDocument/2006/math">
-                    <m:r>
-                      <a:rPr lang="en-US" altLang="zh-CN" i="1" smtClean="0">
-                        <a:latin typeface="Cambria Math" panose="02040503050406030204" pitchFamily="18" charset="0"/>
-                        <a:ea typeface="Cambria Math" panose="02040503050406030204" pitchFamily="18" charset="0"/>
-                      </a:rPr>
-                      <m:t>×</m:t>
-                    </m:r>
-                  </m:oMath>
-                </a14:m>
-                <a:r>
-                  <a:rPr lang="zh-CN" altLang="en-US" dirty="0"/>
-                  <a:t> </a:t>
-                </a:r>
-                <a:r>
-                  <a:rPr lang="en-US" dirty="0"/>
-                  <a:t>improvement.</a:t>
-                </a:r>
-              </a:p>
-            </p:txBody>
-          </p:sp>
-        </mc:Choice>
-        <mc:Fallback xmlns="">
-          <p:sp>
-            <p:nvSpPr>
-              <p:cNvPr id="40" name="TextBox 39">
-                <a:extLst>
-                  <a:ext uri="{FF2B5EF4-FFF2-40B4-BE49-F238E27FC236}">
-                    <a16:creationId xmlns:a16="http://schemas.microsoft.com/office/drawing/2014/main" id="{392BC30E-9189-8963-609C-ADAC23029721}"/>
-                  </a:ext>
-                </a:extLst>
-              </p:cNvPr>
-              <p:cNvSpPr txBox="1">
-                <a:spLocks noRot="1" noChangeAspect="1" noMove="1" noResize="1" noEditPoints="1" noAdjustHandles="1" noChangeArrowheads="1" noChangeShapeType="1" noTextEdit="1"/>
-              </p:cNvSpPr>
-              <p:nvPr/>
-            </p:nvSpPr>
-            <p:spPr>
-              <a:xfrm>
-                <a:off x="7278532" y="1782644"/>
-                <a:ext cx="4681906" cy="2031325"/>
-              </a:xfrm>
-              <a:prstGeom prst="rect">
-                <a:avLst/>
-              </a:prstGeom>
-              <a:blipFill>
-                <a:blip r:embed="rId7"/>
-                <a:stretch>
-                  <a:fillRect l="-1084" t="-1242" r="-542" b="-3727"/>
-                </a:stretch>
-              </a:blipFill>
-            </p:spPr>
-            <p:txBody>
-              <a:bodyPr/>
-              <a:lstStyle/>
-              <a:p>
-                <a:r>
-                  <a:rPr lang="en-US">
-                    <a:noFill/>
-                  </a:rPr>
-                  <a:t> </a:t>
-                </a:r>
-              </a:p>
-            </p:txBody>
-          </p:sp>
-        </mc:Fallback>
-      </mc:AlternateContent>
       <p:sp>
         <p:nvSpPr>
           <p:cNvPr id="2" name="TextBox 1">
@@ -8615,643 +8798,477 @@
           </a:p>
         </p:txBody>
       </p:sp>
-      <p:grpSp>
-        <p:nvGrpSpPr>
-          <p:cNvPr id="3" name="Group 2">
-            <a:extLst>
-              <a:ext uri="{FF2B5EF4-FFF2-40B4-BE49-F238E27FC236}">
-                <a16:creationId xmlns:a16="http://schemas.microsoft.com/office/drawing/2014/main" id="{AED12BBE-99A1-D03D-5DBA-354196C7486E}"/>
-              </a:ext>
-            </a:extLst>
-          </p:cNvPr>
-          <p:cNvGrpSpPr/>
-          <p:nvPr/>
-        </p:nvGrpSpPr>
-        <p:grpSpPr>
-          <a:xfrm>
-            <a:off x="231562" y="3068837"/>
-            <a:ext cx="6787270" cy="3283318"/>
-            <a:chOff x="1179780" y="1078880"/>
-            <a:chExt cx="6787270" cy="3283318"/>
-          </a:xfrm>
-        </p:grpSpPr>
-        <p:pic>
-          <p:nvPicPr>
-            <p:cNvPr id="4" name="Picture 3" descr="A screenshot of a video game&#10;&#10;AI-generated content may be incorrect.">
-              <a:extLst>
-                <a:ext uri="{FF2B5EF4-FFF2-40B4-BE49-F238E27FC236}">
-                  <a16:creationId xmlns:a16="http://schemas.microsoft.com/office/drawing/2014/main" id="{20E99065-E737-A660-9ED7-4C061B853E71}"/>
-                </a:ext>
-              </a:extLst>
-            </p:cNvPr>
-            <p:cNvPicPr>
-              <a:picLocks noChangeAspect="1"/>
-            </p:cNvPicPr>
-            <p:nvPr/>
-          </p:nvPicPr>
-          <p:blipFill>
-            <a:blip r:embed="rId8"/>
-            <a:srcRect r="83631"/>
-            <a:stretch>
-              <a:fillRect/>
-            </a:stretch>
-          </p:blipFill>
-          <p:spPr>
-            <a:xfrm>
-              <a:off x="1179780" y="2749298"/>
-              <a:ext cx="848196" cy="1612900"/>
-            </a:xfrm>
-            <a:prstGeom prst="rect">
-              <a:avLst/>
-            </a:prstGeom>
-          </p:spPr>
-        </p:pic>
-        <p:pic>
-          <p:nvPicPr>
-            <p:cNvPr id="5" name="Picture 4" descr="A screenshot of a video game&#10;&#10;AI-generated content may be incorrect.">
-              <a:extLst>
-                <a:ext uri="{FF2B5EF4-FFF2-40B4-BE49-F238E27FC236}">
-                  <a16:creationId xmlns:a16="http://schemas.microsoft.com/office/drawing/2014/main" id="{AAC6E98D-52B3-86BA-8A1F-356AE288FAB7}"/>
-                </a:ext>
-              </a:extLst>
-            </p:cNvPr>
-            <p:cNvPicPr>
-              <a:picLocks noChangeAspect="1"/>
-            </p:cNvPicPr>
-            <p:nvPr/>
-          </p:nvPicPr>
-          <p:blipFill>
-            <a:blip r:embed="rId8"/>
-            <a:srcRect l="16574"/>
-            <a:stretch>
-              <a:fillRect/>
-            </a:stretch>
-          </p:blipFill>
-          <p:spPr>
-            <a:xfrm>
-              <a:off x="2027976" y="2749298"/>
-              <a:ext cx="5939074" cy="1612900"/>
-            </a:xfrm>
-            <a:prstGeom prst="rect">
-              <a:avLst/>
-            </a:prstGeom>
-          </p:spPr>
-        </p:pic>
-        <p:pic>
-          <p:nvPicPr>
-            <p:cNvPr id="6" name="Picture 5" descr="A screenshot of a computer&#10;&#10;AI-generated content may be incorrect.">
-              <a:extLst>
-                <a:ext uri="{FF2B5EF4-FFF2-40B4-BE49-F238E27FC236}">
-                  <a16:creationId xmlns:a16="http://schemas.microsoft.com/office/drawing/2014/main" id="{316DE3B6-E6CF-AEF7-9C6A-AFE563EBB919}"/>
-                </a:ext>
-              </a:extLst>
-            </p:cNvPr>
-            <p:cNvPicPr>
-              <a:picLocks noChangeAspect="1"/>
-            </p:cNvPicPr>
-            <p:nvPr/>
-          </p:nvPicPr>
-          <p:blipFill>
-            <a:blip r:embed="rId9"/>
-            <a:srcRect r="2089"/>
-            <a:stretch>
-              <a:fillRect/>
-            </a:stretch>
-          </p:blipFill>
-          <p:spPr>
-            <a:xfrm>
-              <a:off x="1179780" y="1149098"/>
-              <a:ext cx="6787270" cy="1600200"/>
-            </a:xfrm>
-            <a:prstGeom prst="rect">
-              <a:avLst/>
-            </a:prstGeom>
-          </p:spPr>
-        </p:pic>
-        <p:cxnSp>
-          <p:nvCxnSpPr>
-            <p:cNvPr id="7" name="Straight Connector 6">
-              <a:extLst>
-                <a:ext uri="{FF2B5EF4-FFF2-40B4-BE49-F238E27FC236}">
-                  <a16:creationId xmlns:a16="http://schemas.microsoft.com/office/drawing/2014/main" id="{1D115FED-B9DF-3AD6-03AE-404E097A7CDB}"/>
-                </a:ext>
-              </a:extLst>
-            </p:cNvPr>
-            <p:cNvCxnSpPr>
-              <a:cxnSpLocks/>
-            </p:cNvCxnSpPr>
-            <p:nvPr/>
-          </p:nvCxnSpPr>
-          <p:spPr>
-            <a:xfrm flipV="1">
-              <a:off x="5460763" y="1149098"/>
-              <a:ext cx="0" cy="3213100"/>
-            </a:xfrm>
-            <a:prstGeom prst="line">
-              <a:avLst/>
-            </a:prstGeom>
-            <a:ln>
-              <a:solidFill>
-                <a:srgbClr val="FF0000"/>
-              </a:solidFill>
-            </a:ln>
-          </p:spPr>
-          <p:style>
-            <a:lnRef idx="2">
-              <a:schemeClr val="accent1"/>
-            </a:lnRef>
-            <a:fillRef idx="0">
-              <a:schemeClr val="accent1"/>
-            </a:fillRef>
-            <a:effectRef idx="1">
-              <a:schemeClr val="accent1"/>
-            </a:effectRef>
-            <a:fontRef idx="minor">
-              <a:schemeClr val="tx1"/>
-            </a:fontRef>
-          </p:style>
-        </p:cxnSp>
-        <p:cxnSp>
-          <p:nvCxnSpPr>
-            <p:cNvPr id="8" name="Straight Connector 7">
-              <a:extLst>
-                <a:ext uri="{FF2B5EF4-FFF2-40B4-BE49-F238E27FC236}">
-                  <a16:creationId xmlns:a16="http://schemas.microsoft.com/office/drawing/2014/main" id="{45FCE287-1774-C787-5E8A-5A3A36861E74}"/>
-                </a:ext>
-              </a:extLst>
-            </p:cNvPr>
-            <p:cNvCxnSpPr>
-              <a:cxnSpLocks/>
-            </p:cNvCxnSpPr>
-            <p:nvPr/>
-          </p:nvCxnSpPr>
-          <p:spPr>
-            <a:xfrm flipV="1">
-              <a:off x="6843757" y="1142748"/>
-              <a:ext cx="0" cy="1606550"/>
-            </a:xfrm>
-            <a:prstGeom prst="line">
-              <a:avLst/>
-            </a:prstGeom>
-            <a:ln>
-              <a:solidFill>
-                <a:srgbClr val="FF0000"/>
-              </a:solidFill>
-            </a:ln>
-          </p:spPr>
-          <p:style>
-            <a:lnRef idx="2">
-              <a:schemeClr val="accent1"/>
-            </a:lnRef>
-            <a:fillRef idx="0">
-              <a:schemeClr val="accent1"/>
-            </a:fillRef>
-            <a:effectRef idx="1">
-              <a:schemeClr val="accent1"/>
-            </a:effectRef>
-            <a:fontRef idx="minor">
-              <a:schemeClr val="tx1"/>
-            </a:fontRef>
-          </p:style>
-        </p:cxnSp>
-        <p:cxnSp>
-          <p:nvCxnSpPr>
-            <p:cNvPr id="9" name="Straight Connector 8">
-              <a:extLst>
-                <a:ext uri="{FF2B5EF4-FFF2-40B4-BE49-F238E27FC236}">
-                  <a16:creationId xmlns:a16="http://schemas.microsoft.com/office/drawing/2014/main" id="{228C4E17-F30F-14BC-EB3E-EAA116937371}"/>
-                </a:ext>
-              </a:extLst>
-            </p:cNvPr>
-            <p:cNvCxnSpPr>
-              <a:cxnSpLocks/>
-            </p:cNvCxnSpPr>
-            <p:nvPr/>
-          </p:nvCxnSpPr>
-          <p:spPr>
-            <a:xfrm flipV="1">
-              <a:off x="7662728" y="2749298"/>
-              <a:ext cx="0" cy="1606550"/>
-            </a:xfrm>
-            <a:prstGeom prst="line">
-              <a:avLst/>
-            </a:prstGeom>
-            <a:ln>
-              <a:solidFill>
-                <a:srgbClr val="FF0000"/>
-              </a:solidFill>
-            </a:ln>
-          </p:spPr>
-          <p:style>
-            <a:lnRef idx="2">
-              <a:schemeClr val="accent1"/>
-            </a:lnRef>
-            <a:fillRef idx="0">
-              <a:schemeClr val="accent1"/>
-            </a:fillRef>
-            <a:effectRef idx="1">
-              <a:schemeClr val="accent1"/>
-            </a:effectRef>
-            <a:fontRef idx="minor">
-              <a:schemeClr val="tx1"/>
-            </a:fontRef>
-          </p:style>
-        </p:cxnSp>
-        <p:sp>
-          <p:nvSpPr>
-            <p:cNvPr id="10" name="TextBox 9">
-              <a:extLst>
-                <a:ext uri="{FF2B5EF4-FFF2-40B4-BE49-F238E27FC236}">
-                  <a16:creationId xmlns:a16="http://schemas.microsoft.com/office/drawing/2014/main" id="{DF742D8A-E629-FB9A-E775-3B5475327E2D}"/>
-                </a:ext>
-              </a:extLst>
-            </p:cNvPr>
-            <p:cNvSpPr txBox="1"/>
-            <p:nvPr/>
-          </p:nvSpPr>
-          <p:spPr>
-            <a:xfrm rot="5400000">
-              <a:off x="4980518" y="1875389"/>
-              <a:ext cx="1172116" cy="307777"/>
-            </a:xfrm>
-            <a:prstGeom prst="rect">
-              <a:avLst/>
-            </a:prstGeom>
-            <a:noFill/>
-          </p:spPr>
-          <p:txBody>
-            <a:bodyPr wrap="none" rtlCol="0">
-              <a:spAutoFit/>
-            </a:bodyPr>
-            <a:lstStyle/>
-            <a:p>
-              <a:r>
-                <a:rPr lang="en-US" sz="1400" dirty="0">
-                  <a:solidFill>
-                    <a:srgbClr val="FF0000"/>
-                  </a:solidFill>
-                </a:rPr>
-                <a:t>Op1 finished</a:t>
-              </a:r>
-            </a:p>
-          </p:txBody>
-        </p:sp>
-        <p:sp>
-          <p:nvSpPr>
-            <p:cNvPr id="11" name="TextBox 10">
-              <a:extLst>
-                <a:ext uri="{FF2B5EF4-FFF2-40B4-BE49-F238E27FC236}">
-                  <a16:creationId xmlns:a16="http://schemas.microsoft.com/office/drawing/2014/main" id="{9E018626-0FFF-8541-1A9F-82ADB5A67BF7}"/>
-                </a:ext>
-              </a:extLst>
-            </p:cNvPr>
-            <p:cNvSpPr txBox="1"/>
-            <p:nvPr/>
-          </p:nvSpPr>
-          <p:spPr>
-            <a:xfrm rot="5400000">
-              <a:off x="6387549" y="1875389"/>
-              <a:ext cx="1172116" cy="307777"/>
-            </a:xfrm>
-            <a:prstGeom prst="rect">
-              <a:avLst/>
-            </a:prstGeom>
-            <a:noFill/>
-          </p:spPr>
-          <p:txBody>
-            <a:bodyPr wrap="none" rtlCol="0">
-              <a:spAutoFit/>
-            </a:bodyPr>
-            <a:lstStyle/>
-            <a:p>
-              <a:r>
-                <a:rPr lang="en-US" sz="1400" dirty="0">
-                  <a:solidFill>
-                    <a:srgbClr val="FF0000"/>
-                  </a:solidFill>
-                </a:rPr>
-                <a:t>Op2 finished</a:t>
-              </a:r>
-            </a:p>
-          </p:txBody>
-        </p:sp>
-        <p:sp>
-          <p:nvSpPr>
-            <p:cNvPr id="12" name="TextBox 11">
-              <a:extLst>
-                <a:ext uri="{FF2B5EF4-FFF2-40B4-BE49-F238E27FC236}">
-                  <a16:creationId xmlns:a16="http://schemas.microsoft.com/office/drawing/2014/main" id="{7A506727-E4DC-65CB-DAB3-1388CEDD0977}"/>
-                </a:ext>
-              </a:extLst>
-            </p:cNvPr>
-            <p:cNvSpPr txBox="1"/>
-            <p:nvPr/>
-          </p:nvSpPr>
-          <p:spPr>
-            <a:xfrm rot="5400000">
-              <a:off x="4980517" y="3368757"/>
-              <a:ext cx="1172116" cy="307777"/>
-            </a:xfrm>
-            <a:prstGeom prst="rect">
-              <a:avLst/>
-            </a:prstGeom>
-            <a:noFill/>
-          </p:spPr>
-          <p:txBody>
-            <a:bodyPr wrap="none" rtlCol="0">
-              <a:spAutoFit/>
-            </a:bodyPr>
-            <a:lstStyle/>
-            <a:p>
-              <a:r>
-                <a:rPr lang="en-US" sz="1400" dirty="0">
-                  <a:solidFill>
-                    <a:srgbClr val="FF0000"/>
-                  </a:solidFill>
-                </a:rPr>
-                <a:t>Op1 finished</a:t>
-              </a:r>
-            </a:p>
-          </p:txBody>
-        </p:sp>
-        <p:sp>
-          <p:nvSpPr>
-            <p:cNvPr id="13" name="TextBox 12">
-              <a:extLst>
-                <a:ext uri="{FF2B5EF4-FFF2-40B4-BE49-F238E27FC236}">
-                  <a16:creationId xmlns:a16="http://schemas.microsoft.com/office/drawing/2014/main" id="{E2DE7110-7BA8-2D50-ED99-06DF55F4A002}"/>
-                </a:ext>
-              </a:extLst>
-            </p:cNvPr>
-            <p:cNvSpPr txBox="1"/>
-            <p:nvPr/>
-          </p:nvSpPr>
-          <p:spPr>
-            <a:xfrm rot="5400000">
-              <a:off x="7203065" y="3368757"/>
-              <a:ext cx="1172116" cy="307777"/>
-            </a:xfrm>
-            <a:prstGeom prst="rect">
-              <a:avLst/>
-            </a:prstGeom>
-            <a:noFill/>
-          </p:spPr>
-          <p:txBody>
-            <a:bodyPr wrap="none" rtlCol="0">
-              <a:spAutoFit/>
-            </a:bodyPr>
-            <a:lstStyle/>
-            <a:p>
-              <a:r>
-                <a:rPr lang="en-US" sz="1400" dirty="0">
-                  <a:solidFill>
-                    <a:srgbClr val="FF0000"/>
-                  </a:solidFill>
-                </a:rPr>
-                <a:t>Op2 finished</a:t>
-              </a:r>
-            </a:p>
-          </p:txBody>
-        </p:sp>
-        <p:cxnSp>
-          <p:nvCxnSpPr>
-            <p:cNvPr id="14" name="Straight Arrow Connector 13">
-              <a:extLst>
-                <a:ext uri="{FF2B5EF4-FFF2-40B4-BE49-F238E27FC236}">
-                  <a16:creationId xmlns:a16="http://schemas.microsoft.com/office/drawing/2014/main" id="{6E3BB1B5-D941-B1CC-8C17-22AFA8AB9A2F}"/>
-                </a:ext>
-              </a:extLst>
-            </p:cNvPr>
-            <p:cNvCxnSpPr/>
-            <p:nvPr/>
-          </p:nvCxnSpPr>
-          <p:spPr>
-            <a:xfrm>
-              <a:off x="5469309" y="1204956"/>
-              <a:ext cx="1358955" cy="0"/>
-            </a:xfrm>
-            <a:prstGeom prst="straightConnector1">
-              <a:avLst/>
-            </a:prstGeom>
-            <a:ln>
-              <a:solidFill>
-                <a:srgbClr val="FF0000"/>
-              </a:solidFill>
-              <a:headEnd type="triangle"/>
-              <a:tailEnd type="triangle"/>
-            </a:ln>
-          </p:spPr>
-          <p:style>
-            <a:lnRef idx="2">
-              <a:schemeClr val="accent1"/>
-            </a:lnRef>
-            <a:fillRef idx="0">
-              <a:schemeClr val="accent1"/>
-            </a:fillRef>
-            <a:effectRef idx="1">
-              <a:schemeClr val="accent1"/>
-            </a:effectRef>
-            <a:fontRef idx="minor">
-              <a:schemeClr val="tx1"/>
-            </a:fontRef>
-          </p:style>
-        </p:cxnSp>
-        <p:sp>
-          <p:nvSpPr>
-            <p:cNvPr id="15" name="TextBox 14">
-              <a:extLst>
-                <a:ext uri="{FF2B5EF4-FFF2-40B4-BE49-F238E27FC236}">
-                  <a16:creationId xmlns:a16="http://schemas.microsoft.com/office/drawing/2014/main" id="{38A2CB2D-DBEA-ED11-F06F-7E08EEF54E72}"/>
-                </a:ext>
-              </a:extLst>
-            </p:cNvPr>
-            <p:cNvSpPr txBox="1"/>
-            <p:nvPr/>
-          </p:nvSpPr>
-          <p:spPr>
-            <a:xfrm>
-              <a:off x="4935079" y="1078880"/>
-              <a:ext cx="586443" cy="307777"/>
-            </a:xfrm>
-            <a:prstGeom prst="rect">
-              <a:avLst/>
-            </a:prstGeom>
-            <a:noFill/>
-          </p:spPr>
-          <p:txBody>
-            <a:bodyPr wrap="none" rtlCol="0">
-              <a:spAutoFit/>
-            </a:bodyPr>
-            <a:lstStyle/>
-            <a:p>
-              <a:r>
-                <a:rPr lang="en-US" sz="1400" dirty="0">
-                  <a:solidFill>
-                    <a:srgbClr val="FF0000"/>
-                  </a:solidFill>
-                </a:rPr>
-                <a:t>5 </a:t>
-              </a:r>
-              <a:r>
-                <a:rPr lang="en-US" sz="1400" dirty="0" err="1">
-                  <a:solidFill>
-                    <a:srgbClr val="FF0000"/>
-                  </a:solidFill>
-                </a:rPr>
-                <a:t>cyc</a:t>
-              </a:r>
-              <a:endParaRPr lang="en-US" sz="1400" dirty="0">
+      <p:pic>
+        <p:nvPicPr>
+          <p:cNvPr id="4" name="Picture 3" descr="A diagram of a cycle&#10;&#10;AI-generated content may be incorrect.">
+            <a:extLst>
+              <a:ext uri="{FF2B5EF4-FFF2-40B4-BE49-F238E27FC236}">
+                <a16:creationId xmlns:a16="http://schemas.microsoft.com/office/drawing/2014/main" id="{122BEC87-C9DC-4861-FC9C-32DF7F531A3F}"/>
+              </a:ext>
+            </a:extLst>
+          </p:cNvPr>
+          <p:cNvPicPr>
+            <a:picLocks noChangeAspect="1"/>
+          </p:cNvPicPr>
+          <p:nvPr/>
+        </p:nvPicPr>
+        <p:blipFill>
+          <a:blip r:embed="rId6"/>
+          <a:stretch>
+            <a:fillRect/>
+          </a:stretch>
+        </p:blipFill>
+        <p:spPr>
+          <a:xfrm>
+            <a:off x="7903676" y="284281"/>
+            <a:ext cx="3962027" cy="4857871"/>
+          </a:xfrm>
+          <a:prstGeom prst="rect">
+            <a:avLst/>
+          </a:prstGeom>
+        </p:spPr>
+      </p:pic>
+      <p:pic>
+        <p:nvPicPr>
+          <p:cNvPr id="19" name="Picture 18" descr="A screenshot of a computer&#10;&#10;AI-generated content may be incorrect.">
+            <a:extLst>
+              <a:ext uri="{FF2B5EF4-FFF2-40B4-BE49-F238E27FC236}">
+                <a16:creationId xmlns:a16="http://schemas.microsoft.com/office/drawing/2014/main" id="{372C09E5-2917-CA5E-2588-C75D414BEB01}"/>
+              </a:ext>
+            </a:extLst>
+          </p:cNvPr>
+          <p:cNvPicPr>
+            <a:picLocks noChangeAspect="1"/>
+          </p:cNvPicPr>
+          <p:nvPr/>
+        </p:nvPicPr>
+        <p:blipFill>
+          <a:blip r:embed="rId7"/>
+          <a:stretch>
+            <a:fillRect/>
+          </a:stretch>
+        </p:blipFill>
+        <p:spPr>
+          <a:xfrm>
+            <a:off x="224476" y="3955130"/>
+            <a:ext cx="8854364" cy="2424733"/>
+          </a:xfrm>
+          <a:prstGeom prst="rect">
+            <a:avLst/>
+          </a:prstGeom>
+        </p:spPr>
+      </p:pic>
+      <p:sp>
+        <p:nvSpPr>
+          <p:cNvPr id="7" name="TextBox 6">
+            <a:extLst>
+              <a:ext uri="{FF2B5EF4-FFF2-40B4-BE49-F238E27FC236}">
+                <a16:creationId xmlns:a16="http://schemas.microsoft.com/office/drawing/2014/main" id="{7456A903-3589-602C-34F3-4B6C0F8AFA3F}"/>
+              </a:ext>
+            </a:extLst>
+          </p:cNvPr>
+          <p:cNvSpPr txBox="1"/>
+          <p:nvPr/>
+        </p:nvSpPr>
+        <p:spPr>
+          <a:xfrm>
+            <a:off x="4349669" y="3943841"/>
+            <a:ext cx="673711" cy="276999"/>
+          </a:xfrm>
+          <a:prstGeom prst="rect">
+            <a:avLst/>
+          </a:prstGeom>
+          <a:noFill/>
+        </p:spPr>
+        <p:txBody>
+          <a:bodyPr wrap="none" rtlCol="0">
+            <a:spAutoFit/>
+          </a:bodyPr>
+          <a:lstStyle/>
+          <a:p>
+            <a:r>
+              <a:rPr lang="en-US" sz="1200" dirty="0">
                 <a:solidFill>
                   <a:srgbClr val="FF0000"/>
                 </a:solidFill>
-              </a:endParaRPr>
-            </a:p>
-          </p:txBody>
-        </p:sp>
-        <p:sp>
-          <p:nvSpPr>
-            <p:cNvPr id="16" name="TextBox 15">
-              <a:extLst>
-                <a:ext uri="{FF2B5EF4-FFF2-40B4-BE49-F238E27FC236}">
-                  <a16:creationId xmlns:a16="http://schemas.microsoft.com/office/drawing/2014/main" id="{FFAEA79B-06F7-ED69-0397-9CFE2E51F759}"/>
-                </a:ext>
-              </a:extLst>
-            </p:cNvPr>
-            <p:cNvSpPr txBox="1"/>
-            <p:nvPr/>
-          </p:nvSpPr>
-          <p:spPr>
-            <a:xfrm>
-              <a:off x="4935078" y="2691639"/>
-              <a:ext cx="586443" cy="307777"/>
-            </a:xfrm>
-            <a:prstGeom prst="rect">
-              <a:avLst/>
-            </a:prstGeom>
-            <a:noFill/>
-          </p:spPr>
-          <p:txBody>
-            <a:bodyPr wrap="none" rtlCol="0">
-              <a:spAutoFit/>
-            </a:bodyPr>
-            <a:lstStyle/>
-            <a:p>
-              <a:r>
-                <a:rPr lang="en-US" sz="1400" dirty="0">
-                  <a:solidFill>
-                    <a:srgbClr val="FF0000"/>
-                  </a:solidFill>
-                </a:rPr>
-                <a:t>8 </a:t>
-              </a:r>
-              <a:r>
-                <a:rPr lang="en-US" sz="1400" dirty="0" err="1">
-                  <a:solidFill>
-                    <a:srgbClr val="FF0000"/>
-                  </a:solidFill>
-                </a:rPr>
-                <a:t>cyc</a:t>
-              </a:r>
-              <a:endParaRPr lang="en-US" sz="1400" dirty="0">
+              </a:rPr>
+              <a:t>Cycle 0</a:t>
+            </a:r>
+          </a:p>
+        </p:txBody>
+      </p:sp>
+      <p:sp>
+        <p:nvSpPr>
+          <p:cNvPr id="8" name="TextBox 7">
+            <a:extLst>
+              <a:ext uri="{FF2B5EF4-FFF2-40B4-BE49-F238E27FC236}">
+                <a16:creationId xmlns:a16="http://schemas.microsoft.com/office/drawing/2014/main" id="{15A673DA-3CD2-E310-0968-E52A28F1C39B}"/>
+              </a:ext>
+            </a:extLst>
+          </p:cNvPr>
+          <p:cNvSpPr txBox="1"/>
+          <p:nvPr/>
+        </p:nvSpPr>
+        <p:spPr>
+          <a:xfrm>
+            <a:off x="8113632" y="3943841"/>
+            <a:ext cx="673711" cy="276999"/>
+          </a:xfrm>
+          <a:prstGeom prst="rect">
+            <a:avLst/>
+          </a:prstGeom>
+          <a:noFill/>
+        </p:spPr>
+        <p:txBody>
+          <a:bodyPr wrap="none" rtlCol="0">
+            <a:spAutoFit/>
+          </a:bodyPr>
+          <a:lstStyle/>
+          <a:p>
+            <a:r>
+              <a:rPr lang="en-US" sz="1200" dirty="0">
                 <a:solidFill>
                   <a:srgbClr val="FF0000"/>
                 </a:solidFill>
-              </a:endParaRPr>
-            </a:p>
-          </p:txBody>
-        </p:sp>
-        <p:sp>
-          <p:nvSpPr>
-            <p:cNvPr id="17" name="Rectangle 16">
-              <a:extLst>
-                <a:ext uri="{FF2B5EF4-FFF2-40B4-BE49-F238E27FC236}">
-                  <a16:creationId xmlns:a16="http://schemas.microsoft.com/office/drawing/2014/main" id="{E6EC3C52-30FC-F881-76DE-EF995DCB2885}"/>
-                </a:ext>
-              </a:extLst>
-            </p:cNvPr>
-            <p:cNvSpPr/>
-            <p:nvPr/>
-          </p:nvSpPr>
-          <p:spPr>
-            <a:xfrm>
-              <a:off x="3410969" y="1905712"/>
-              <a:ext cx="1409363" cy="581546"/>
-            </a:xfrm>
-            <a:prstGeom prst="rect">
-              <a:avLst/>
-            </a:prstGeom>
-            <a:noFill/>
-            <a:ln>
-              <a:solidFill>
-                <a:srgbClr val="00B0F0"/>
-              </a:solidFill>
-            </a:ln>
-          </p:spPr>
-          <p:style>
-            <a:lnRef idx="2">
-              <a:schemeClr val="accent1">
-                <a:shade val="15000"/>
-              </a:schemeClr>
-            </a:lnRef>
-            <a:fillRef idx="1">
-              <a:schemeClr val="accent1"/>
-            </a:fillRef>
-            <a:effectRef idx="0">
-              <a:schemeClr val="accent1"/>
-            </a:effectRef>
-            <a:fontRef idx="minor">
-              <a:schemeClr val="lt1"/>
-            </a:fontRef>
-          </p:style>
-          <p:txBody>
-            <a:bodyPr rtlCol="0" anchor="ctr"/>
-            <a:lstStyle/>
-            <a:p>
-              <a:pPr algn="ctr"/>
-              <a:endParaRPr lang="en-US"/>
-            </a:p>
-          </p:txBody>
-        </p:sp>
-        <p:sp>
-          <p:nvSpPr>
-            <p:cNvPr id="18" name="TextBox 17">
-              <a:extLst>
-                <a:ext uri="{FF2B5EF4-FFF2-40B4-BE49-F238E27FC236}">
-                  <a16:creationId xmlns:a16="http://schemas.microsoft.com/office/drawing/2014/main" id="{9242D6BD-04B4-7A57-99DF-E2D048077BA3}"/>
-                </a:ext>
-              </a:extLst>
-            </p:cNvPr>
-            <p:cNvSpPr txBox="1"/>
-            <p:nvPr/>
-          </p:nvSpPr>
-          <p:spPr>
-            <a:xfrm>
-              <a:off x="2224589" y="1824012"/>
-              <a:ext cx="1273508" cy="954107"/>
-            </a:xfrm>
-            <a:prstGeom prst="rect">
-              <a:avLst/>
-            </a:prstGeom>
-            <a:noFill/>
-          </p:spPr>
-          <p:txBody>
-            <a:bodyPr wrap="square" rtlCol="0">
-              <a:spAutoFit/>
-            </a:bodyPr>
-            <a:lstStyle/>
-            <a:p>
-              <a:r>
-                <a:rPr lang="en-US" sz="1400" dirty="0">
-                  <a:solidFill>
-                    <a:srgbClr val="00B0F0"/>
-                  </a:solidFill>
-                </a:rPr>
-                <a:t>Loading next weight matrix during Op1 computation</a:t>
-              </a:r>
-            </a:p>
-          </p:txBody>
-        </p:sp>
-      </p:grpSp>
+              </a:rPr>
+              <a:t>Cycle 8</a:t>
+            </a:r>
+          </a:p>
+        </p:txBody>
+      </p:sp>
+      <p:cxnSp>
+        <p:nvCxnSpPr>
+          <p:cNvPr id="10" name="Elbow Connector 9">
+            <a:extLst>
+              <a:ext uri="{FF2B5EF4-FFF2-40B4-BE49-F238E27FC236}">
+                <a16:creationId xmlns:a16="http://schemas.microsoft.com/office/drawing/2014/main" id="{71AD94B5-5046-3814-195B-C697B2B7BA35}"/>
+              </a:ext>
+            </a:extLst>
+          </p:cNvPr>
+          <p:cNvCxnSpPr>
+            <a:cxnSpLocks/>
+          </p:cNvCxnSpPr>
+          <p:nvPr/>
+        </p:nvCxnSpPr>
+        <p:spPr>
+          <a:xfrm>
+            <a:off x="4798866" y="4363717"/>
+            <a:ext cx="1063834" cy="233424"/>
+          </a:xfrm>
+          <a:prstGeom prst="bentConnector3">
+            <a:avLst>
+              <a:gd name="adj1" fmla="val 56367"/>
+            </a:avLst>
+          </a:prstGeom>
+          <a:ln>
+            <a:solidFill>
+              <a:srgbClr val="FF0000"/>
+            </a:solidFill>
+          </a:ln>
+        </p:spPr>
+        <p:style>
+          <a:lnRef idx="2">
+            <a:schemeClr val="accent1"/>
+          </a:lnRef>
+          <a:fillRef idx="0">
+            <a:schemeClr val="accent1"/>
+          </a:fillRef>
+          <a:effectRef idx="1">
+            <a:schemeClr val="accent1"/>
+          </a:effectRef>
+          <a:fontRef idx="minor">
+            <a:schemeClr val="tx1"/>
+          </a:fontRef>
+        </p:style>
+      </p:cxnSp>
+      <p:cxnSp>
+        <p:nvCxnSpPr>
+          <p:cNvPr id="13" name="Elbow Connector 12">
+            <a:extLst>
+              <a:ext uri="{FF2B5EF4-FFF2-40B4-BE49-F238E27FC236}">
+                <a16:creationId xmlns:a16="http://schemas.microsoft.com/office/drawing/2014/main" id="{A77405CB-789B-17A4-EBE5-A7620E320F39}"/>
+              </a:ext>
+            </a:extLst>
+          </p:cNvPr>
+          <p:cNvCxnSpPr>
+            <a:cxnSpLocks/>
+          </p:cNvCxnSpPr>
+          <p:nvPr/>
+        </p:nvCxnSpPr>
+        <p:spPr>
+          <a:xfrm>
+            <a:off x="5847202" y="4819685"/>
+            <a:ext cx="942850" cy="201600"/>
+          </a:xfrm>
+          <a:prstGeom prst="bentConnector3">
+            <a:avLst>
+              <a:gd name="adj1" fmla="val 50000"/>
+            </a:avLst>
+          </a:prstGeom>
+          <a:ln>
+            <a:solidFill>
+              <a:srgbClr val="FF0000"/>
+            </a:solidFill>
+          </a:ln>
+        </p:spPr>
+        <p:style>
+          <a:lnRef idx="2">
+            <a:schemeClr val="accent1"/>
+          </a:lnRef>
+          <a:fillRef idx="0">
+            <a:schemeClr val="accent1"/>
+          </a:fillRef>
+          <a:effectRef idx="1">
+            <a:schemeClr val="accent1"/>
+          </a:effectRef>
+          <a:fontRef idx="minor">
+            <a:schemeClr val="tx1"/>
+          </a:fontRef>
+        </p:style>
+      </p:cxnSp>
+      <p:cxnSp>
+        <p:nvCxnSpPr>
+          <p:cNvPr id="15" name="Elbow Connector 14">
+            <a:extLst>
+              <a:ext uri="{FF2B5EF4-FFF2-40B4-BE49-F238E27FC236}">
+                <a16:creationId xmlns:a16="http://schemas.microsoft.com/office/drawing/2014/main" id="{9A87B58F-78C1-1606-E219-5D65D10CBA70}"/>
+              </a:ext>
+            </a:extLst>
+          </p:cNvPr>
+          <p:cNvCxnSpPr>
+            <a:cxnSpLocks/>
+          </p:cNvCxnSpPr>
+          <p:nvPr/>
+        </p:nvCxnSpPr>
+        <p:spPr>
+          <a:xfrm>
+            <a:off x="6790052" y="5251578"/>
+            <a:ext cx="942850" cy="201600"/>
+          </a:xfrm>
+          <a:prstGeom prst="bentConnector3">
+            <a:avLst>
+              <a:gd name="adj1" fmla="val 50000"/>
+            </a:avLst>
+          </a:prstGeom>
+          <a:ln>
+            <a:solidFill>
+              <a:srgbClr val="FF0000"/>
+            </a:solidFill>
+          </a:ln>
+        </p:spPr>
+        <p:style>
+          <a:lnRef idx="2">
+            <a:schemeClr val="accent1"/>
+          </a:lnRef>
+          <a:fillRef idx="0">
+            <a:schemeClr val="accent1"/>
+          </a:fillRef>
+          <a:effectRef idx="1">
+            <a:schemeClr val="accent1"/>
+          </a:effectRef>
+          <a:fontRef idx="minor">
+            <a:schemeClr val="tx1"/>
+          </a:fontRef>
+        </p:style>
+      </p:cxnSp>
+      <p:cxnSp>
+        <p:nvCxnSpPr>
+          <p:cNvPr id="17" name="Straight Connector 16">
+            <a:extLst>
+              <a:ext uri="{FF2B5EF4-FFF2-40B4-BE49-F238E27FC236}">
+                <a16:creationId xmlns:a16="http://schemas.microsoft.com/office/drawing/2014/main" id="{90704D21-35BA-751C-24A0-E1865DB1F1E2}"/>
+              </a:ext>
+            </a:extLst>
+          </p:cNvPr>
+          <p:cNvCxnSpPr/>
+          <p:nvPr/>
+        </p:nvCxnSpPr>
+        <p:spPr>
+          <a:xfrm>
+            <a:off x="5854951" y="4604890"/>
+            <a:ext cx="0" cy="214795"/>
+          </a:xfrm>
+          <a:prstGeom prst="line">
+            <a:avLst/>
+          </a:prstGeom>
+          <a:ln>
+            <a:solidFill>
+              <a:srgbClr val="FF0000"/>
+            </a:solidFill>
+          </a:ln>
+        </p:spPr>
+        <p:style>
+          <a:lnRef idx="2">
+            <a:schemeClr val="accent1"/>
+          </a:lnRef>
+          <a:fillRef idx="0">
+            <a:schemeClr val="accent1"/>
+          </a:fillRef>
+          <a:effectRef idx="1">
+            <a:schemeClr val="accent1"/>
+          </a:effectRef>
+          <a:fontRef idx="minor">
+            <a:schemeClr val="tx1"/>
+          </a:fontRef>
+        </p:style>
+      </p:cxnSp>
+      <p:cxnSp>
+        <p:nvCxnSpPr>
+          <p:cNvPr id="18" name="Straight Connector 17">
+            <a:extLst>
+              <a:ext uri="{FF2B5EF4-FFF2-40B4-BE49-F238E27FC236}">
+                <a16:creationId xmlns:a16="http://schemas.microsoft.com/office/drawing/2014/main" id="{9B448431-1707-F537-4E63-3058E12D2A8E}"/>
+              </a:ext>
+            </a:extLst>
+          </p:cNvPr>
+          <p:cNvCxnSpPr/>
+          <p:nvPr/>
+        </p:nvCxnSpPr>
+        <p:spPr>
+          <a:xfrm>
+            <a:off x="6791810" y="5025225"/>
+            <a:ext cx="0" cy="214795"/>
+          </a:xfrm>
+          <a:prstGeom prst="line">
+            <a:avLst/>
+          </a:prstGeom>
+          <a:ln>
+            <a:solidFill>
+              <a:srgbClr val="FF0000"/>
+            </a:solidFill>
+          </a:ln>
+        </p:spPr>
+        <p:style>
+          <a:lnRef idx="2">
+            <a:schemeClr val="accent1"/>
+          </a:lnRef>
+          <a:fillRef idx="0">
+            <a:schemeClr val="accent1"/>
+          </a:fillRef>
+          <a:effectRef idx="1">
+            <a:schemeClr val="accent1"/>
+          </a:effectRef>
+          <a:fontRef idx="minor">
+            <a:schemeClr val="tx1"/>
+          </a:fontRef>
+        </p:style>
+      </p:cxnSp>
+      <p:cxnSp>
+        <p:nvCxnSpPr>
+          <p:cNvPr id="22" name="Straight Connector 21">
+            <a:extLst>
+              <a:ext uri="{FF2B5EF4-FFF2-40B4-BE49-F238E27FC236}">
+                <a16:creationId xmlns:a16="http://schemas.microsoft.com/office/drawing/2014/main" id="{D3E04192-D942-F0E9-1A0E-52AF8816417F}"/>
+              </a:ext>
+            </a:extLst>
+          </p:cNvPr>
+          <p:cNvCxnSpPr/>
+          <p:nvPr/>
+        </p:nvCxnSpPr>
+        <p:spPr>
+          <a:xfrm>
+            <a:off x="7730622" y="5453178"/>
+            <a:ext cx="0" cy="214795"/>
+          </a:xfrm>
+          <a:prstGeom prst="line">
+            <a:avLst/>
+          </a:prstGeom>
+          <a:ln>
+            <a:solidFill>
+              <a:srgbClr val="FF0000"/>
+            </a:solidFill>
+          </a:ln>
+        </p:spPr>
+        <p:style>
+          <a:lnRef idx="2">
+            <a:schemeClr val="accent1"/>
+          </a:lnRef>
+          <a:fillRef idx="0">
+            <a:schemeClr val="accent1"/>
+          </a:fillRef>
+          <a:effectRef idx="1">
+            <a:schemeClr val="accent1"/>
+          </a:effectRef>
+          <a:fontRef idx="minor">
+            <a:schemeClr val="tx1"/>
+          </a:fontRef>
+        </p:style>
+      </p:cxnSp>
+      <p:sp>
+        <p:nvSpPr>
+          <p:cNvPr id="23" name="TextBox 22">
+            <a:extLst>
+              <a:ext uri="{FF2B5EF4-FFF2-40B4-BE49-F238E27FC236}">
+                <a16:creationId xmlns:a16="http://schemas.microsoft.com/office/drawing/2014/main" id="{0B6FB31F-FCA5-DEE5-77E4-98CE73E3D7C9}"/>
+              </a:ext>
+            </a:extLst>
+          </p:cNvPr>
+          <p:cNvSpPr txBox="1"/>
+          <p:nvPr/>
+        </p:nvSpPr>
+        <p:spPr>
+          <a:xfrm>
+            <a:off x="2491584" y="5640178"/>
+            <a:ext cx="1968296" cy="646331"/>
+          </a:xfrm>
+          <a:prstGeom prst="rect">
+            <a:avLst/>
+          </a:prstGeom>
+          <a:noFill/>
+        </p:spPr>
+        <p:txBody>
+          <a:bodyPr wrap="none" rtlCol="0">
+            <a:spAutoFit/>
+          </a:bodyPr>
+          <a:lstStyle/>
+          <a:p>
+            <a:r>
+              <a:rPr lang="en-US" sz="1200" dirty="0">
+                <a:solidFill>
+                  <a:srgbClr val="FF0000"/>
+                </a:solidFill>
+              </a:rPr>
+              <a:t>Bit order: {PE22, 21, 12, 11}</a:t>
+            </a:r>
+          </a:p>
+          <a:p>
+            <a:r>
+              <a:rPr lang="en-US" sz="1200" dirty="0" err="1">
+                <a:solidFill>
+                  <a:srgbClr val="FF0000"/>
+                </a:solidFill>
+              </a:rPr>
+              <a:t>en</a:t>
+            </a:r>
+            <a:r>
+              <a:rPr lang="en-US" sz="1200" dirty="0">
+                <a:solidFill>
+                  <a:srgbClr val="FF0000"/>
+                </a:solidFill>
+              </a:rPr>
+              <a:t>: 0 for keep; 1 for load</a:t>
+            </a:r>
+          </a:p>
+          <a:p>
+            <a:r>
+              <a:rPr lang="en-US" sz="1200" dirty="0" err="1">
+                <a:solidFill>
+                  <a:srgbClr val="FF0000"/>
+                </a:solidFill>
+              </a:rPr>
+              <a:t>sel</a:t>
+            </a:r>
+            <a:r>
+              <a:rPr lang="en-US" sz="1200" dirty="0">
+                <a:solidFill>
+                  <a:srgbClr val="FF0000"/>
+                </a:solidFill>
+              </a:rPr>
+              <a:t>: 0 for buf0; 1 for buf1</a:t>
+            </a:r>
+          </a:p>
+        </p:txBody>
+      </p:sp>
     </p:spTree>
     <p:extLst>
       <p:ext uri="{BB962C8B-B14F-4D97-AF65-F5344CB8AC3E}">
